--- a/tchc-fabric-demo/deck/TCHC_Fabric_Deep_Dive.pptx
+++ b/tchc-fabric-demo/deck/TCHC_Fabric_Deep_Dive.pptx
@@ -23,6 +23,8 @@
     <p:sldId id="271" r:id="rId22"/>
     <p:sldId id="272" r:id="rId23"/>
     <p:sldId id="273" r:id="rId24"/>
+    <p:sldId id="274" r:id="rId25"/>
+    <p:sldId id="275" r:id="rId26"/>
   </p:sldIdLst>
   <p:sldSz cx="12191695" cy="6858000" type="screen4x3"/>
   <p:notesSz cx="6858000" cy="9144000"/>
@@ -5454,7 +5456,7 @@
                 </a:solidFill>
                 <a:latin typeface="Consolas"/>
               </a:rPr>
-              <a:t>ITEM 10</a:t>
+              <a:t>BEYOND THIS ENGAGEMENT</a:t>
             </a:r>
           </a:p>
         </p:txBody>
@@ -5489,7 +5491,7 @@
                 </a:solidFill>
                 <a:latin typeface="Georgia"/>
               </a:rPr>
-              <a:t>Pre-kickoff checklist</a:t>
+              <a:t>Where the AI piece fits</a:t>
             </a:r>
           </a:p>
         </p:txBody>
@@ -5546,8 +5548,8 @@
         </p:nvSpPr>
         <p:spPr>
           <a:xfrm>
-            <a:off x="868680" y="2011680"/>
-            <a:ext cx="10424160" cy="320040"/>
+            <a:off x="868680" y="1965960"/>
+            <a:ext cx="10424160" cy="365760"/>
           </a:xfrm>
           <a:prstGeom prst="rect">
             <a:avLst/>
@@ -5568,7 +5570,7 @@
                 </a:solidFill>
                 <a:latin typeface="Georgia"/>
               </a:rPr>
-              <a:t>An owner and a date against each, before we leave the room.</a:t>
+              <a:t>Out of scope for the MVP, and worth deciding deliberately rather than drifting into.</a:t>
             </a:r>
           </a:p>
         </p:txBody>
@@ -5581,17 +5583,17 @@
         </p:nvSpPr>
         <p:spPr>
           <a:xfrm>
-            <a:off x="896112" y="2551176"/>
-            <a:ext cx="146304" cy="146304"/>
-          </a:xfrm>
-          <a:prstGeom prst="rect">
-            <a:avLst/>
-          </a:prstGeom>
-          <a:noFill/>
-          <a:ln w="15875">
-            <a:solidFill>
-              <a:srgbClr val="2F6F6B"/>
-            </a:solidFill>
+            <a:off x="868680" y="2423160"/>
+            <a:ext cx="3346704" cy="2743200"/>
+          </a:xfrm>
+          <a:prstGeom prst="rect">
+            <a:avLst/>
+          </a:prstGeom>
+          <a:solidFill>
+            <a:srgbClr val="F5F7F7"/>
+          </a:solidFill>
+          <a:ln>
+            <a:noFill/>
           </a:ln>
           <a:effectLst/>
         </p:spPr>
@@ -5619,1013 +5621,14 @@
       </p:sp>
       <p:sp>
         <p:nvSpPr>
-          <p:cNvPr id="7" name="TextBox 6"/>
-          <p:cNvSpPr txBox="1"/>
-          <p:nvPr/>
-        </p:nvSpPr>
-        <p:spPr>
-          <a:xfrm>
-            <a:off x="1234440" y="2478024"/>
-            <a:ext cx="7589520" cy="365760"/>
-          </a:xfrm>
-          <a:prstGeom prst="rect">
-            <a:avLst/>
-          </a:prstGeom>
-          <a:noFill/>
-        </p:spPr>
-        <p:txBody>
-          <a:bodyPr wrap="square" anchor="t">
-            <a:spAutoFit/>
-          </a:bodyPr>
-          <a:lstStyle/>
-          <a:p>
-            <a:pPr algn="l"/>
-            <a:r>
-              <a:rPr sz="1400" b="0">
-                <a:solidFill>
-                  <a:srgbClr val="1F3243"/>
-                </a:solidFill>
-                <a:latin typeface="Segoe UI"/>
-              </a:rPr>
-              <a:t>TCHC product owner named, with allocation confirmed for the engagement</a:t>
-            </a:r>
-          </a:p>
-        </p:txBody>
-      </p:sp>
-      <p:sp>
-        <p:nvSpPr>
-          <p:cNvPr id="8" name="TextBox 7"/>
-          <p:cNvSpPr txBox="1"/>
-          <p:nvPr/>
-        </p:nvSpPr>
-        <p:spPr>
-          <a:xfrm>
-            <a:off x="9052560" y="2478024"/>
-            <a:ext cx="1097280" cy="365760"/>
-          </a:xfrm>
-          <a:prstGeom prst="rect">
-            <a:avLst/>
-          </a:prstGeom>
-          <a:noFill/>
-        </p:spPr>
-        <p:txBody>
-          <a:bodyPr wrap="square" anchor="t">
-            <a:spAutoFit/>
-          </a:bodyPr>
-          <a:lstStyle/>
-          <a:p>
-            <a:pPr algn="l"/>
-            <a:r>
-              <a:rPr sz="1100" b="0">
-                <a:solidFill>
-                  <a:srgbClr val="C6CFCF"/>
-                </a:solidFill>
-                <a:latin typeface="Consolas"/>
-              </a:rPr>
-              <a:t>owner</a:t>
-            </a:r>
-          </a:p>
-        </p:txBody>
-      </p:sp>
-      <p:sp>
-        <p:nvSpPr>
-          <p:cNvPr id="9" name="TextBox 8"/>
-          <p:cNvSpPr txBox="1"/>
-          <p:nvPr/>
-        </p:nvSpPr>
-        <p:spPr>
-          <a:xfrm>
-            <a:off x="10332720" y="2478024"/>
-            <a:ext cx="1005840" cy="365760"/>
-          </a:xfrm>
-          <a:prstGeom prst="rect">
-            <a:avLst/>
-          </a:prstGeom>
-          <a:noFill/>
-        </p:spPr>
-        <p:txBody>
-          <a:bodyPr wrap="square" anchor="t">
-            <a:spAutoFit/>
-          </a:bodyPr>
-          <a:lstStyle/>
-          <a:p>
-            <a:pPr algn="l"/>
-            <a:r>
-              <a:rPr sz="1100" b="0">
-                <a:solidFill>
-                  <a:srgbClr val="C6CFCF"/>
-                </a:solidFill>
-                <a:latin typeface="Consolas"/>
-              </a:rPr>
-              <a:t>date</a:t>
-            </a:r>
-          </a:p>
-        </p:txBody>
-      </p:sp>
-      <p:sp>
-        <p:nvSpPr>
-          <p:cNvPr id="10" name="Rectangle 9"/>
+          <p:cNvPr id="7" name="Rectangle 6"/>
           <p:cNvSpPr/>
           <p:nvPr/>
         </p:nvSpPr>
         <p:spPr>
           <a:xfrm>
-            <a:off x="896112" y="3063240"/>
-            <a:ext cx="146304" cy="146304"/>
-          </a:xfrm>
-          <a:prstGeom prst="rect">
-            <a:avLst/>
-          </a:prstGeom>
-          <a:noFill/>
-          <a:ln w="15875">
-            <a:solidFill>
-              <a:srgbClr val="2F6F6B"/>
-            </a:solidFill>
-          </a:ln>
-          <a:effectLst/>
-        </p:spPr>
-        <p:style>
-          <a:lnRef idx="1">
-            <a:schemeClr val="accent1"/>
-          </a:lnRef>
-          <a:fillRef idx="3">
-            <a:schemeClr val="accent1"/>
-          </a:fillRef>
-          <a:effectRef idx="2">
-            <a:schemeClr val="accent1"/>
-          </a:effectRef>
-          <a:fontRef idx="minor">
-            <a:schemeClr val="lt1"/>
-          </a:fontRef>
-        </p:style>
-        <p:txBody>
-          <a:bodyPr rtlCol="0" anchor="ctr"/>
-          <a:lstStyle/>
-          <a:p>
-            <a:pPr algn="ctr"/>
-          </a:p>
-        </p:txBody>
-      </p:sp>
-      <p:sp>
-        <p:nvSpPr>
-          <p:cNvPr id="11" name="TextBox 10"/>
-          <p:cNvSpPr txBox="1"/>
-          <p:nvPr/>
-        </p:nvSpPr>
-        <p:spPr>
-          <a:xfrm>
-            <a:off x="1234440" y="2990088"/>
-            <a:ext cx="7589520" cy="365760"/>
-          </a:xfrm>
-          <a:prstGeom prst="rect">
-            <a:avLst/>
-          </a:prstGeom>
-          <a:noFill/>
-        </p:spPr>
-        <p:txBody>
-          <a:bodyPr wrap="square" anchor="t">
-            <a:spAutoFit/>
-          </a:bodyPr>
-          <a:lstStyle/>
-          <a:p>
-            <a:pPr algn="l"/>
-            <a:r>
-              <a:rPr sz="1400" b="0">
-                <a:solidFill>
-                  <a:srgbClr val="1F3243"/>
-                </a:solidFill>
-                <a:latin typeface="Segoe UI"/>
-              </a:rPr>
-              <a:t>Fabric capacity decision — F-SKU size, reservation, Microsoft-hosted or TCHC tenant</a:t>
-            </a:r>
-          </a:p>
-        </p:txBody>
-      </p:sp>
-      <p:sp>
-        <p:nvSpPr>
-          <p:cNvPr id="12" name="TextBox 11"/>
-          <p:cNvSpPr txBox="1"/>
-          <p:nvPr/>
-        </p:nvSpPr>
-        <p:spPr>
-          <a:xfrm>
-            <a:off x="9052560" y="2990088"/>
-            <a:ext cx="1097280" cy="365760"/>
-          </a:xfrm>
-          <a:prstGeom prst="rect">
-            <a:avLst/>
-          </a:prstGeom>
-          <a:noFill/>
-        </p:spPr>
-        <p:txBody>
-          <a:bodyPr wrap="square" anchor="t">
-            <a:spAutoFit/>
-          </a:bodyPr>
-          <a:lstStyle/>
-          <a:p>
-            <a:pPr algn="l"/>
-            <a:r>
-              <a:rPr sz="1100" b="0">
-                <a:solidFill>
-                  <a:srgbClr val="C6CFCF"/>
-                </a:solidFill>
-                <a:latin typeface="Consolas"/>
-              </a:rPr>
-              <a:t>owner</a:t>
-            </a:r>
-          </a:p>
-        </p:txBody>
-      </p:sp>
-      <p:sp>
-        <p:nvSpPr>
-          <p:cNvPr id="13" name="TextBox 12"/>
-          <p:cNvSpPr txBox="1"/>
-          <p:nvPr/>
-        </p:nvSpPr>
-        <p:spPr>
-          <a:xfrm>
-            <a:off x="10332720" y="2990088"/>
-            <a:ext cx="1005840" cy="365760"/>
-          </a:xfrm>
-          <a:prstGeom prst="rect">
-            <a:avLst/>
-          </a:prstGeom>
-          <a:noFill/>
-        </p:spPr>
-        <p:txBody>
-          <a:bodyPr wrap="square" anchor="t">
-            <a:spAutoFit/>
-          </a:bodyPr>
-          <a:lstStyle/>
-          <a:p>
-            <a:pPr algn="l"/>
-            <a:r>
-              <a:rPr sz="1100" b="0">
-                <a:solidFill>
-                  <a:srgbClr val="C6CFCF"/>
-                </a:solidFill>
-                <a:latin typeface="Consolas"/>
-              </a:rPr>
-              <a:t>date</a:t>
-            </a:r>
-          </a:p>
-        </p:txBody>
-      </p:sp>
-      <p:sp>
-        <p:nvSpPr>
-          <p:cNvPr id="14" name="Rectangle 13"/>
-          <p:cNvSpPr/>
-          <p:nvPr/>
-        </p:nvSpPr>
-        <p:spPr>
-          <a:xfrm>
-            <a:off x="896112" y="3575304"/>
-            <a:ext cx="146304" cy="146304"/>
-          </a:xfrm>
-          <a:prstGeom prst="rect">
-            <a:avLst/>
-          </a:prstGeom>
-          <a:noFill/>
-          <a:ln w="15875">
-            <a:solidFill>
-              <a:srgbClr val="2F6F6B"/>
-            </a:solidFill>
-          </a:ln>
-          <a:effectLst/>
-        </p:spPr>
-        <p:style>
-          <a:lnRef idx="1">
-            <a:schemeClr val="accent1"/>
-          </a:lnRef>
-          <a:fillRef idx="3">
-            <a:schemeClr val="accent1"/>
-          </a:fillRef>
-          <a:effectRef idx="2">
-            <a:schemeClr val="accent1"/>
-          </a:effectRef>
-          <a:fontRef idx="minor">
-            <a:schemeClr val="lt1"/>
-          </a:fontRef>
-        </p:style>
-        <p:txBody>
-          <a:bodyPr rtlCol="0" anchor="ctr"/>
-          <a:lstStyle/>
-          <a:p>
-            <a:pPr algn="ctr"/>
-          </a:p>
-        </p:txBody>
-      </p:sp>
-      <p:sp>
-        <p:nvSpPr>
-          <p:cNvPr id="15" name="TextBox 14"/>
-          <p:cNvSpPr txBox="1"/>
-          <p:nvPr/>
-        </p:nvSpPr>
-        <p:spPr>
-          <a:xfrm>
-            <a:off x="1234440" y="3502152"/>
-            <a:ext cx="7589520" cy="365760"/>
-          </a:xfrm>
-          <a:prstGeom prst="rect">
-            <a:avLst/>
-          </a:prstGeom>
-          <a:noFill/>
-        </p:spPr>
-        <p:txBody>
-          <a:bodyPr wrap="square" anchor="t">
-            <a:spAutoFit/>
-          </a:bodyPr>
-          <a:lstStyle/>
-          <a:p>
-            <a:pPr algn="l"/>
-            <a:r>
-              <a:rPr sz="1400" b="0">
-                <a:solidFill>
-                  <a:srgbClr val="1F3243"/>
-                </a:solidFill>
-                <a:latin typeface="Segoe UI"/>
-              </a:rPr>
-              <a:t>Azure subscription, Entra ID groups, administrative access for environment build</a:t>
-            </a:r>
-          </a:p>
-        </p:txBody>
-      </p:sp>
-      <p:sp>
-        <p:nvSpPr>
-          <p:cNvPr id="16" name="TextBox 15"/>
-          <p:cNvSpPr txBox="1"/>
-          <p:nvPr/>
-        </p:nvSpPr>
-        <p:spPr>
-          <a:xfrm>
-            <a:off x="9052560" y="3502152"/>
-            <a:ext cx="1097280" cy="365760"/>
-          </a:xfrm>
-          <a:prstGeom prst="rect">
-            <a:avLst/>
-          </a:prstGeom>
-          <a:noFill/>
-        </p:spPr>
-        <p:txBody>
-          <a:bodyPr wrap="square" anchor="t">
-            <a:spAutoFit/>
-          </a:bodyPr>
-          <a:lstStyle/>
-          <a:p>
-            <a:pPr algn="l"/>
-            <a:r>
-              <a:rPr sz="1100" b="0">
-                <a:solidFill>
-                  <a:srgbClr val="C6CFCF"/>
-                </a:solidFill>
-                <a:latin typeface="Consolas"/>
-              </a:rPr>
-              <a:t>owner</a:t>
-            </a:r>
-          </a:p>
-        </p:txBody>
-      </p:sp>
-      <p:sp>
-        <p:nvSpPr>
-          <p:cNvPr id="17" name="TextBox 16"/>
-          <p:cNvSpPr txBox="1"/>
-          <p:nvPr/>
-        </p:nvSpPr>
-        <p:spPr>
-          <a:xfrm>
-            <a:off x="10332720" y="3502152"/>
-            <a:ext cx="1005840" cy="365760"/>
-          </a:xfrm>
-          <a:prstGeom prst="rect">
-            <a:avLst/>
-          </a:prstGeom>
-          <a:noFill/>
-        </p:spPr>
-        <p:txBody>
-          <a:bodyPr wrap="square" anchor="t">
-            <a:spAutoFit/>
-          </a:bodyPr>
-          <a:lstStyle/>
-          <a:p>
-            <a:pPr algn="l"/>
-            <a:r>
-              <a:rPr sz="1100" b="0">
-                <a:solidFill>
-                  <a:srgbClr val="C6CFCF"/>
-                </a:solidFill>
-                <a:latin typeface="Consolas"/>
-              </a:rPr>
-              <a:t>date</a:t>
-            </a:r>
-          </a:p>
-        </p:txBody>
-      </p:sp>
-      <p:sp>
-        <p:nvSpPr>
-          <p:cNvPr id="18" name="Rectangle 17"/>
-          <p:cNvSpPr/>
-          <p:nvPr/>
-        </p:nvSpPr>
-        <p:spPr>
-          <a:xfrm>
-            <a:off x="896112" y="4087368"/>
-            <a:ext cx="146304" cy="146304"/>
-          </a:xfrm>
-          <a:prstGeom prst="rect">
-            <a:avLst/>
-          </a:prstGeom>
-          <a:noFill/>
-          <a:ln w="15875">
-            <a:solidFill>
-              <a:srgbClr val="2F6F6B"/>
-            </a:solidFill>
-          </a:ln>
-          <a:effectLst/>
-        </p:spPr>
-        <p:style>
-          <a:lnRef idx="1">
-            <a:schemeClr val="accent1"/>
-          </a:lnRef>
-          <a:fillRef idx="3">
-            <a:schemeClr val="accent1"/>
-          </a:fillRef>
-          <a:effectRef idx="2">
-            <a:schemeClr val="accent1"/>
-          </a:effectRef>
-          <a:fontRef idx="minor">
-            <a:schemeClr val="lt1"/>
-          </a:fontRef>
-        </p:style>
-        <p:txBody>
-          <a:bodyPr rtlCol="0" anchor="ctr"/>
-          <a:lstStyle/>
-          <a:p>
-            <a:pPr algn="ctr"/>
-          </a:p>
-        </p:txBody>
-      </p:sp>
-      <p:sp>
-        <p:nvSpPr>
-          <p:cNvPr id="19" name="TextBox 18"/>
-          <p:cNvSpPr txBox="1"/>
-          <p:nvPr/>
-        </p:nvSpPr>
-        <p:spPr>
-          <a:xfrm>
-            <a:off x="1234440" y="4014215"/>
-            <a:ext cx="7589520" cy="365760"/>
-          </a:xfrm>
-          <a:prstGeom prst="rect">
-            <a:avLst/>
-          </a:prstGeom>
-          <a:noFill/>
-        </p:spPr>
-        <p:txBody>
-          <a:bodyPr wrap="square" anchor="t">
-            <a:spAutoFit/>
-          </a:bodyPr>
-          <a:lstStyle/>
-          <a:p>
-            <a:pPr algn="l"/>
-            <a:r>
-              <a:rPr sz="1400" b="0">
-                <a:solidFill>
-                  <a:srgbClr val="1F3243"/>
-                </a:solidFill>
-                <a:latin typeface="Segoe UI"/>
-              </a:rPr>
-              <a:t>Source system access for arrears and vacancy, plus a gateway host if required</a:t>
-            </a:r>
-          </a:p>
-        </p:txBody>
-      </p:sp>
-      <p:sp>
-        <p:nvSpPr>
-          <p:cNvPr id="20" name="TextBox 19"/>
-          <p:cNvSpPr txBox="1"/>
-          <p:nvPr/>
-        </p:nvSpPr>
-        <p:spPr>
-          <a:xfrm>
-            <a:off x="9052560" y="4014215"/>
-            <a:ext cx="1097280" cy="365760"/>
-          </a:xfrm>
-          <a:prstGeom prst="rect">
-            <a:avLst/>
-          </a:prstGeom>
-          <a:noFill/>
-        </p:spPr>
-        <p:txBody>
-          <a:bodyPr wrap="square" anchor="t">
-            <a:spAutoFit/>
-          </a:bodyPr>
-          <a:lstStyle/>
-          <a:p>
-            <a:pPr algn="l"/>
-            <a:r>
-              <a:rPr sz="1100" b="0">
-                <a:solidFill>
-                  <a:srgbClr val="C6CFCF"/>
-                </a:solidFill>
-                <a:latin typeface="Consolas"/>
-              </a:rPr>
-              <a:t>owner</a:t>
-            </a:r>
-          </a:p>
-        </p:txBody>
-      </p:sp>
-      <p:sp>
-        <p:nvSpPr>
-          <p:cNvPr id="21" name="TextBox 20"/>
-          <p:cNvSpPr txBox="1"/>
-          <p:nvPr/>
-        </p:nvSpPr>
-        <p:spPr>
-          <a:xfrm>
-            <a:off x="10332720" y="4014215"/>
-            <a:ext cx="1005840" cy="365760"/>
-          </a:xfrm>
-          <a:prstGeom prst="rect">
-            <a:avLst/>
-          </a:prstGeom>
-          <a:noFill/>
-        </p:spPr>
-        <p:txBody>
-          <a:bodyPr wrap="square" anchor="t">
-            <a:spAutoFit/>
-          </a:bodyPr>
-          <a:lstStyle/>
-          <a:p>
-            <a:pPr algn="l"/>
-            <a:r>
-              <a:rPr sz="1100" b="0">
-                <a:solidFill>
-                  <a:srgbClr val="C6CFCF"/>
-                </a:solidFill>
-                <a:latin typeface="Consolas"/>
-              </a:rPr>
-              <a:t>date</a:t>
-            </a:r>
-          </a:p>
-        </p:txBody>
-      </p:sp>
-      <p:sp>
-        <p:nvSpPr>
-          <p:cNvPr id="22" name="Rectangle 21"/>
-          <p:cNvSpPr/>
-          <p:nvPr/>
-        </p:nvSpPr>
-        <p:spPr>
-          <a:xfrm>
-            <a:off x="896112" y="4599432"/>
-            <a:ext cx="146304" cy="146304"/>
-          </a:xfrm>
-          <a:prstGeom prst="rect">
-            <a:avLst/>
-          </a:prstGeom>
-          <a:noFill/>
-          <a:ln w="15875">
-            <a:solidFill>
-              <a:srgbClr val="2F6F6B"/>
-            </a:solidFill>
-          </a:ln>
-          <a:effectLst/>
-        </p:spPr>
-        <p:style>
-          <a:lnRef idx="1">
-            <a:schemeClr val="accent1"/>
-          </a:lnRef>
-          <a:fillRef idx="3">
-            <a:schemeClr val="accent1"/>
-          </a:fillRef>
-          <a:effectRef idx="2">
-            <a:schemeClr val="accent1"/>
-          </a:effectRef>
-          <a:fontRef idx="minor">
-            <a:schemeClr val="lt1"/>
-          </a:fontRef>
-        </p:style>
-        <p:txBody>
-          <a:bodyPr rtlCol="0" anchor="ctr"/>
-          <a:lstStyle/>
-          <a:p>
-            <a:pPr algn="ctr"/>
-          </a:p>
-        </p:txBody>
-      </p:sp>
-      <p:sp>
-        <p:nvSpPr>
-          <p:cNvPr id="23" name="TextBox 22"/>
-          <p:cNvSpPr txBox="1"/>
-          <p:nvPr/>
-        </p:nvSpPr>
-        <p:spPr>
-          <a:xfrm>
-            <a:off x="1234440" y="4526280"/>
-            <a:ext cx="7589520" cy="365760"/>
-          </a:xfrm>
-          <a:prstGeom prst="rect">
-            <a:avLst/>
-          </a:prstGeom>
-          <a:noFill/>
-        </p:spPr>
-        <p:txBody>
-          <a:bodyPr wrap="square" anchor="t">
-            <a:spAutoFit/>
-          </a:bodyPr>
-          <a:lstStyle/>
-          <a:p>
-            <a:pPr algn="l"/>
-            <a:r>
-              <a:rPr sz="1400" b="0">
-                <a:solidFill>
-                  <a:srgbClr val="1F3243"/>
-                </a:solidFill>
-                <a:latin typeface="Segoe UI"/>
-              </a:rPr>
-              <a:t>Azure DevOps or GitHub project available to the delivery team</a:t>
-            </a:r>
-          </a:p>
-        </p:txBody>
-      </p:sp>
-      <p:sp>
-        <p:nvSpPr>
-          <p:cNvPr id="24" name="TextBox 23"/>
-          <p:cNvSpPr txBox="1"/>
-          <p:nvPr/>
-        </p:nvSpPr>
-        <p:spPr>
-          <a:xfrm>
-            <a:off x="9052560" y="4526280"/>
-            <a:ext cx="1097280" cy="365760"/>
-          </a:xfrm>
-          <a:prstGeom prst="rect">
-            <a:avLst/>
-          </a:prstGeom>
-          <a:noFill/>
-        </p:spPr>
-        <p:txBody>
-          <a:bodyPr wrap="square" anchor="t">
-            <a:spAutoFit/>
-          </a:bodyPr>
-          <a:lstStyle/>
-          <a:p>
-            <a:pPr algn="l"/>
-            <a:r>
-              <a:rPr sz="1100" b="0">
-                <a:solidFill>
-                  <a:srgbClr val="C6CFCF"/>
-                </a:solidFill>
-                <a:latin typeface="Consolas"/>
-              </a:rPr>
-              <a:t>owner</a:t>
-            </a:r>
-          </a:p>
-        </p:txBody>
-      </p:sp>
-      <p:sp>
-        <p:nvSpPr>
-          <p:cNvPr id="25" name="TextBox 24"/>
-          <p:cNvSpPr txBox="1"/>
-          <p:nvPr/>
-        </p:nvSpPr>
-        <p:spPr>
-          <a:xfrm>
-            <a:off x="10332720" y="4526280"/>
-            <a:ext cx="1005840" cy="365760"/>
-          </a:xfrm>
-          <a:prstGeom prst="rect">
-            <a:avLst/>
-          </a:prstGeom>
-          <a:noFill/>
-        </p:spPr>
-        <p:txBody>
-          <a:bodyPr wrap="square" anchor="t">
-            <a:spAutoFit/>
-          </a:bodyPr>
-          <a:lstStyle/>
-          <a:p>
-            <a:pPr algn="l"/>
-            <a:r>
-              <a:rPr sz="1100" b="0">
-                <a:solidFill>
-                  <a:srgbClr val="C6CFCF"/>
-                </a:solidFill>
-                <a:latin typeface="Consolas"/>
-              </a:rPr>
-              <a:t>date</a:t>
-            </a:r>
-          </a:p>
-        </p:txBody>
-      </p:sp>
-      <p:sp>
-        <p:nvSpPr>
-          <p:cNvPr id="26" name="Rectangle 25"/>
-          <p:cNvSpPr/>
-          <p:nvPr/>
-        </p:nvSpPr>
-        <p:spPr>
-          <a:xfrm>
-            <a:off x="896112" y="5111496"/>
-            <a:ext cx="146304" cy="146304"/>
-          </a:xfrm>
-          <a:prstGeom prst="rect">
-            <a:avLst/>
-          </a:prstGeom>
-          <a:noFill/>
-          <a:ln w="15875">
-            <a:solidFill>
-              <a:srgbClr val="2F6F6B"/>
-            </a:solidFill>
-          </a:ln>
-          <a:effectLst/>
-        </p:spPr>
-        <p:style>
-          <a:lnRef idx="1">
-            <a:schemeClr val="accent1"/>
-          </a:lnRef>
-          <a:fillRef idx="3">
-            <a:schemeClr val="accent1"/>
-          </a:fillRef>
-          <a:effectRef idx="2">
-            <a:schemeClr val="accent1"/>
-          </a:effectRef>
-          <a:fontRef idx="minor">
-            <a:schemeClr val="lt1"/>
-          </a:fontRef>
-        </p:style>
-        <p:txBody>
-          <a:bodyPr rtlCol="0" anchor="ctr"/>
-          <a:lstStyle/>
-          <a:p>
-            <a:pPr algn="ctr"/>
-          </a:p>
-        </p:txBody>
-      </p:sp>
-      <p:sp>
-        <p:nvSpPr>
-          <p:cNvPr id="27" name="TextBox 26"/>
-          <p:cNvSpPr txBox="1"/>
-          <p:nvPr/>
-        </p:nvSpPr>
-        <p:spPr>
-          <a:xfrm>
-            <a:off x="1234440" y="5038344"/>
-            <a:ext cx="7589520" cy="365760"/>
-          </a:xfrm>
-          <a:prstGeom prst="rect">
-            <a:avLst/>
-          </a:prstGeom>
-          <a:noFill/>
-        </p:spPr>
-        <p:txBody>
-          <a:bodyPr wrap="square" anchor="t">
-            <a:spAutoFit/>
-          </a:bodyPr>
-          <a:lstStyle/>
-          <a:p>
-            <a:pPr algn="l"/>
-            <a:r>
-              <a:rPr sz="1400" b="0">
-                <a:solidFill>
-                  <a:srgbClr val="1F3243"/>
-                </a:solidFill>
-                <a:latin typeface="Segoe UI"/>
-              </a:rPr>
-              <a:t>Development environment data — live, masked, or synthetic</a:t>
-            </a:r>
-          </a:p>
-        </p:txBody>
-      </p:sp>
-      <p:sp>
-        <p:nvSpPr>
-          <p:cNvPr id="28" name="TextBox 27"/>
-          <p:cNvSpPr txBox="1"/>
-          <p:nvPr/>
-        </p:nvSpPr>
-        <p:spPr>
-          <a:xfrm>
-            <a:off x="9052560" y="5038344"/>
-            <a:ext cx="1097280" cy="365760"/>
-          </a:xfrm>
-          <a:prstGeom prst="rect">
-            <a:avLst/>
-          </a:prstGeom>
-          <a:noFill/>
-        </p:spPr>
-        <p:txBody>
-          <a:bodyPr wrap="square" anchor="t">
-            <a:spAutoFit/>
-          </a:bodyPr>
-          <a:lstStyle/>
-          <a:p>
-            <a:pPr algn="l"/>
-            <a:r>
-              <a:rPr sz="1100" b="0">
-                <a:solidFill>
-                  <a:srgbClr val="C6CFCF"/>
-                </a:solidFill>
-                <a:latin typeface="Consolas"/>
-              </a:rPr>
-              <a:t>owner</a:t>
-            </a:r>
-          </a:p>
-        </p:txBody>
-      </p:sp>
-      <p:sp>
-        <p:nvSpPr>
-          <p:cNvPr id="29" name="TextBox 28"/>
-          <p:cNvSpPr txBox="1"/>
-          <p:nvPr/>
-        </p:nvSpPr>
-        <p:spPr>
-          <a:xfrm>
-            <a:off x="10332720" y="5038344"/>
-            <a:ext cx="1005840" cy="365760"/>
-          </a:xfrm>
-          <a:prstGeom prst="rect">
-            <a:avLst/>
-          </a:prstGeom>
-          <a:noFill/>
-        </p:spPr>
-        <p:txBody>
-          <a:bodyPr wrap="square" anchor="t">
-            <a:spAutoFit/>
-          </a:bodyPr>
-          <a:lstStyle/>
-          <a:p>
-            <a:pPr algn="l"/>
-            <a:r>
-              <a:rPr sz="1100" b="0">
-                <a:solidFill>
-                  <a:srgbClr val="C6CFCF"/>
-                </a:solidFill>
-                <a:latin typeface="Consolas"/>
-              </a:rPr>
-              <a:t>date</a:t>
-            </a:r>
-          </a:p>
-        </p:txBody>
-      </p:sp>
-      <p:sp>
-        <p:nvSpPr>
-          <p:cNvPr id="30" name="Rectangle 29"/>
-          <p:cNvSpPr/>
-          <p:nvPr/>
-        </p:nvSpPr>
-        <p:spPr>
-          <a:xfrm>
-            <a:off x="896112" y="5623560"/>
-            <a:ext cx="146304" cy="146304"/>
-          </a:xfrm>
-          <a:prstGeom prst="rect">
-            <a:avLst/>
-          </a:prstGeom>
-          <a:noFill/>
-          <a:ln w="15875">
-            <a:solidFill>
-              <a:srgbClr val="2F6F6B"/>
-            </a:solidFill>
-          </a:ln>
-          <a:effectLst/>
-        </p:spPr>
-        <p:style>
-          <a:lnRef idx="1">
-            <a:schemeClr val="accent1"/>
-          </a:lnRef>
-          <a:fillRef idx="3">
-            <a:schemeClr val="accent1"/>
-          </a:fillRef>
-          <a:effectRef idx="2">
-            <a:schemeClr val="accent1"/>
-          </a:effectRef>
-          <a:fontRef idx="minor">
-            <a:schemeClr val="lt1"/>
-          </a:fontRef>
-        </p:style>
-        <p:txBody>
-          <a:bodyPr rtlCol="0" anchor="ctr"/>
-          <a:lstStyle/>
-          <a:p>
-            <a:pPr algn="ctr"/>
-          </a:p>
-        </p:txBody>
-      </p:sp>
-      <p:sp>
-        <p:nvSpPr>
-          <p:cNvPr id="31" name="TextBox 30"/>
-          <p:cNvSpPr txBox="1"/>
-          <p:nvPr/>
-        </p:nvSpPr>
-        <p:spPr>
-          <a:xfrm>
-            <a:off x="1234440" y="5550408"/>
-            <a:ext cx="7589520" cy="365760"/>
-          </a:xfrm>
-          <a:prstGeom prst="rect">
-            <a:avLst/>
-          </a:prstGeom>
-          <a:noFill/>
-        </p:spPr>
-        <p:txBody>
-          <a:bodyPr wrap="square" anchor="t">
-            <a:spAutoFit/>
-          </a:bodyPr>
-          <a:lstStyle/>
-          <a:p>
-            <a:pPr algn="l"/>
-            <a:r>
-              <a:rPr sz="1400" b="0">
-                <a:solidFill>
-                  <a:srgbClr val="1F3243"/>
-                </a:solidFill>
-                <a:latin typeface="Segoe UI"/>
-              </a:rPr>
-              <a:t>Security and privacy review slot booked inside the first two weeks</a:t>
-            </a:r>
-          </a:p>
-        </p:txBody>
-      </p:sp>
-      <p:sp>
-        <p:nvSpPr>
-          <p:cNvPr id="32" name="TextBox 31"/>
-          <p:cNvSpPr txBox="1"/>
-          <p:nvPr/>
-        </p:nvSpPr>
-        <p:spPr>
-          <a:xfrm>
-            <a:off x="9052560" y="5550408"/>
-            <a:ext cx="1097280" cy="365760"/>
-          </a:xfrm>
-          <a:prstGeom prst="rect">
-            <a:avLst/>
-          </a:prstGeom>
-          <a:noFill/>
-        </p:spPr>
-        <p:txBody>
-          <a:bodyPr wrap="square" anchor="t">
-            <a:spAutoFit/>
-          </a:bodyPr>
-          <a:lstStyle/>
-          <a:p>
-            <a:pPr algn="l"/>
-            <a:r>
-              <a:rPr sz="1100" b="0">
-                <a:solidFill>
-                  <a:srgbClr val="C6CFCF"/>
-                </a:solidFill>
-                <a:latin typeface="Consolas"/>
-              </a:rPr>
-              <a:t>owner</a:t>
-            </a:r>
-          </a:p>
-        </p:txBody>
-      </p:sp>
-      <p:sp>
-        <p:nvSpPr>
-          <p:cNvPr id="33" name="TextBox 32"/>
-          <p:cNvSpPr txBox="1"/>
-          <p:nvPr/>
-        </p:nvSpPr>
-        <p:spPr>
-          <a:xfrm>
-            <a:off x="10332720" y="5550408"/>
-            <a:ext cx="1005840" cy="365760"/>
-          </a:xfrm>
-          <a:prstGeom prst="rect">
-            <a:avLst/>
-          </a:prstGeom>
-          <a:noFill/>
-        </p:spPr>
-        <p:txBody>
-          <a:bodyPr wrap="square" anchor="t">
-            <a:spAutoFit/>
-          </a:bodyPr>
-          <a:lstStyle/>
-          <a:p>
-            <a:pPr algn="l"/>
-            <a:r>
-              <a:rPr sz="1100" b="0">
-                <a:solidFill>
-                  <a:srgbClr val="C6CFCF"/>
-                </a:solidFill>
-                <a:latin typeface="Consolas"/>
-              </a:rPr>
-              <a:t>date</a:t>
-            </a:r>
-          </a:p>
-        </p:txBody>
-      </p:sp>
-      <p:sp>
-        <p:nvSpPr>
-          <p:cNvPr id="34" name="Rectangle 33"/>
-          <p:cNvSpPr/>
-          <p:nvPr/>
-        </p:nvSpPr>
-        <p:spPr>
-          <a:xfrm>
-            <a:off x="868680" y="6263640"/>
-            <a:ext cx="10424160" cy="25400"/>
+            <a:off x="868680" y="2423160"/>
+            <a:ext cx="3346704" cy="50800"/>
           </a:xfrm>
           <a:prstGeom prst="rect">
             <a:avLst/>
@@ -6662,14 +5665,561 @@
       </p:sp>
       <p:sp>
         <p:nvSpPr>
-          <p:cNvPr id="35" name="TextBox 34"/>
-          <p:cNvSpPr txBox="1"/>
-          <p:nvPr/>
-        </p:nvSpPr>
-        <p:spPr>
-          <a:xfrm>
-            <a:off x="868680" y="6400800"/>
-            <a:ext cx="10424160" cy="365760"/>
+          <p:cNvPr id="8" name="TextBox 7"/>
+          <p:cNvSpPr txBox="1"/>
+          <p:nvPr/>
+        </p:nvSpPr>
+        <p:spPr>
+          <a:xfrm>
+            <a:off x="1097280" y="2651760"/>
+            <a:ext cx="2926080" cy="320040"/>
+          </a:xfrm>
+          <a:prstGeom prst="rect">
+            <a:avLst/>
+          </a:prstGeom>
+          <a:noFill/>
+        </p:spPr>
+        <p:txBody>
+          <a:bodyPr wrap="square" anchor="t">
+            <a:spAutoFit/>
+          </a:bodyPr>
+          <a:lstStyle/>
+          <a:p>
+            <a:pPr algn="l"/>
+            <a:r>
+              <a:rPr sz="1100" b="1">
+                <a:solidFill>
+                  <a:srgbClr val="2F6F6B"/>
+                </a:solidFill>
+                <a:latin typeface="Consolas"/>
+              </a:rPr>
+              <a:t>ASK THE DATA</a:t>
+            </a:r>
+          </a:p>
+        </p:txBody>
+      </p:sp>
+      <p:sp>
+        <p:nvSpPr>
+          <p:cNvPr id="9" name="TextBox 8"/>
+          <p:cNvSpPr txBox="1"/>
+          <p:nvPr/>
+        </p:nvSpPr>
+        <p:spPr>
+          <a:xfrm>
+            <a:off x="1097280" y="3063240"/>
+            <a:ext cx="2926080" cy="1828800"/>
+          </a:xfrm>
+          <a:prstGeom prst="rect">
+            <a:avLst/>
+          </a:prstGeom>
+          <a:noFill/>
+        </p:spPr>
+        <p:txBody>
+          <a:bodyPr wrap="square" anchor="t">
+            <a:spAutoFit/>
+          </a:bodyPr>
+          <a:lstStyle/>
+          <a:p>
+            <a:pPr algn="l"/>
+            <a:r>
+              <a:rPr sz="1200" b="0">
+                <a:solidFill>
+                  <a:srgbClr val="1F3243"/>
+                </a:solidFill>
+                <a:latin typeface="Segoe UI"/>
+              </a:rPr>
+              <a:t>A Fabric data agent over the Gold layer.
+“Which buildings carry the most
+balance over ninety days?” in plain
+language, against the same measures
+the report uses.</a:t>
+            </a:r>
+          </a:p>
+        </p:txBody>
+      </p:sp>
+      <p:sp>
+        <p:nvSpPr>
+          <p:cNvPr id="10" name="TextBox 9"/>
+          <p:cNvSpPr txBox="1"/>
+          <p:nvPr/>
+        </p:nvSpPr>
+        <p:spPr>
+          <a:xfrm>
+            <a:off x="1097280" y="4828032"/>
+            <a:ext cx="2926080" cy="274320"/>
+          </a:xfrm>
+          <a:prstGeom prst="rect">
+            <a:avLst/>
+          </a:prstGeom>
+          <a:noFill/>
+        </p:spPr>
+        <p:txBody>
+          <a:bodyPr wrap="square" anchor="t">
+            <a:spAutoFit/>
+          </a:bodyPr>
+          <a:lstStyle/>
+          <a:p>
+            <a:pPr algn="l"/>
+            <a:r>
+              <a:rPr sz="1000" b="1">
+                <a:solidFill>
+                  <a:srgbClr val="64748B"/>
+                </a:solidFill>
+                <a:latin typeface="Consolas"/>
+              </a:rPr>
+              <a:t>Closest to ready</a:t>
+            </a:r>
+          </a:p>
+        </p:txBody>
+      </p:sp>
+      <p:sp>
+        <p:nvSpPr>
+          <p:cNvPr id="11" name="Rectangle 10"/>
+          <p:cNvSpPr/>
+          <p:nvPr/>
+        </p:nvSpPr>
+        <p:spPr>
+          <a:xfrm>
+            <a:off x="4379976" y="2423160"/>
+            <a:ext cx="3346704" cy="2743200"/>
+          </a:xfrm>
+          <a:prstGeom prst="rect">
+            <a:avLst/>
+          </a:prstGeom>
+          <a:solidFill>
+            <a:srgbClr val="F5F7F7"/>
+          </a:solidFill>
+          <a:ln>
+            <a:noFill/>
+          </a:ln>
+          <a:effectLst/>
+        </p:spPr>
+        <p:style>
+          <a:lnRef idx="1">
+            <a:schemeClr val="accent1"/>
+          </a:lnRef>
+          <a:fillRef idx="3">
+            <a:schemeClr val="accent1"/>
+          </a:fillRef>
+          <a:effectRef idx="2">
+            <a:schemeClr val="accent1"/>
+          </a:effectRef>
+          <a:fontRef idx="minor">
+            <a:schemeClr val="lt1"/>
+          </a:fontRef>
+        </p:style>
+        <p:txBody>
+          <a:bodyPr rtlCol="0" anchor="ctr"/>
+          <a:lstStyle/>
+          <a:p>
+            <a:pPr algn="ctr"/>
+          </a:p>
+        </p:txBody>
+      </p:sp>
+      <p:sp>
+        <p:nvSpPr>
+          <p:cNvPr id="12" name="Rectangle 11"/>
+          <p:cNvSpPr/>
+          <p:nvPr/>
+        </p:nvSpPr>
+        <p:spPr>
+          <a:xfrm>
+            <a:off x="4379976" y="2423160"/>
+            <a:ext cx="3346704" cy="50800"/>
+          </a:xfrm>
+          <a:prstGeom prst="rect">
+            <a:avLst/>
+          </a:prstGeom>
+          <a:solidFill>
+            <a:srgbClr val="2F6F6B"/>
+          </a:solidFill>
+          <a:ln>
+            <a:noFill/>
+          </a:ln>
+          <a:effectLst/>
+        </p:spPr>
+        <p:style>
+          <a:lnRef idx="1">
+            <a:schemeClr val="accent1"/>
+          </a:lnRef>
+          <a:fillRef idx="3">
+            <a:schemeClr val="accent1"/>
+          </a:fillRef>
+          <a:effectRef idx="2">
+            <a:schemeClr val="accent1"/>
+          </a:effectRef>
+          <a:fontRef idx="minor">
+            <a:schemeClr val="lt1"/>
+          </a:fontRef>
+        </p:style>
+        <p:txBody>
+          <a:bodyPr rtlCol="0" anchor="ctr"/>
+          <a:lstStyle/>
+          <a:p>
+            <a:pPr algn="ctr"/>
+          </a:p>
+        </p:txBody>
+      </p:sp>
+      <p:sp>
+        <p:nvSpPr>
+          <p:cNvPr id="13" name="TextBox 12"/>
+          <p:cNvSpPr txBox="1"/>
+          <p:nvPr/>
+        </p:nvSpPr>
+        <p:spPr>
+          <a:xfrm>
+            <a:off x="4608576" y="2651760"/>
+            <a:ext cx="2926080" cy="320040"/>
+          </a:xfrm>
+          <a:prstGeom prst="rect">
+            <a:avLst/>
+          </a:prstGeom>
+          <a:noFill/>
+        </p:spPr>
+        <p:txBody>
+          <a:bodyPr wrap="square" anchor="t">
+            <a:spAutoFit/>
+          </a:bodyPr>
+          <a:lstStyle/>
+          <a:p>
+            <a:pPr algn="l"/>
+            <a:r>
+              <a:rPr sz="1100" b="1">
+                <a:solidFill>
+                  <a:srgbClr val="2F6F6B"/>
+                </a:solidFill>
+                <a:latin typeface="Consolas"/>
+              </a:rPr>
+              <a:t>EXPLAIN THE DATA</a:t>
+            </a:r>
+          </a:p>
+        </p:txBody>
+      </p:sp>
+      <p:sp>
+        <p:nvSpPr>
+          <p:cNvPr id="14" name="TextBox 13"/>
+          <p:cNvSpPr txBox="1"/>
+          <p:nvPr/>
+        </p:nvSpPr>
+        <p:spPr>
+          <a:xfrm>
+            <a:off x="4608576" y="3063240"/>
+            <a:ext cx="2926080" cy="1828800"/>
+          </a:xfrm>
+          <a:prstGeom prst="rect">
+            <a:avLst/>
+          </a:prstGeom>
+          <a:noFill/>
+        </p:spPr>
+        <p:txBody>
+          <a:bodyPr wrap="square" anchor="t">
+            <a:spAutoFit/>
+          </a:bodyPr>
+          <a:lstStyle/>
+          <a:p>
+            <a:pPr algn="l"/>
+            <a:r>
+              <a:rPr sz="1200" b="0">
+                <a:solidFill>
+                  <a:srgbClr val="1F3243"/>
+                </a:solidFill>
+                <a:latin typeface="Segoe UI"/>
+              </a:rPr>
+              <a:t>A monthly arrears briefing, written
+from the pipeline's own numbers.
+The model never calculates. It renders
+what Gold produced, and every figure
+cites the row it came from.</a:t>
+            </a:r>
+          </a:p>
+        </p:txBody>
+      </p:sp>
+      <p:sp>
+        <p:nvSpPr>
+          <p:cNvPr id="15" name="TextBox 14"/>
+          <p:cNvSpPr txBox="1"/>
+          <p:nvPr/>
+        </p:nvSpPr>
+        <p:spPr>
+          <a:xfrm>
+            <a:off x="4608576" y="4828032"/>
+            <a:ext cx="2926080" cy="274320"/>
+          </a:xfrm>
+          <a:prstGeom prst="rect">
+            <a:avLst/>
+          </a:prstGeom>
+          <a:noFill/>
+        </p:spPr>
+        <p:txBody>
+          <a:bodyPr wrap="square" anchor="t">
+            <a:spAutoFit/>
+          </a:bodyPr>
+          <a:lstStyle/>
+          <a:p>
+            <a:pPr algn="l"/>
+            <a:r>
+              <a:rPr sz="1000" b="1">
+                <a:solidFill>
+                  <a:srgbClr val="64748B"/>
+                </a:solidFill>
+                <a:latin typeface="Consolas"/>
+              </a:rPr>
+              <a:t>Built twice, elsewhere</a:t>
+            </a:r>
+          </a:p>
+        </p:txBody>
+      </p:sp>
+      <p:sp>
+        <p:nvSpPr>
+          <p:cNvPr id="16" name="Rectangle 15"/>
+          <p:cNvSpPr/>
+          <p:nvPr/>
+        </p:nvSpPr>
+        <p:spPr>
+          <a:xfrm>
+            <a:off x="7891271" y="2423160"/>
+            <a:ext cx="3346704" cy="2743200"/>
+          </a:xfrm>
+          <a:prstGeom prst="rect">
+            <a:avLst/>
+          </a:prstGeom>
+          <a:solidFill>
+            <a:srgbClr val="F5F7F7"/>
+          </a:solidFill>
+          <a:ln>
+            <a:noFill/>
+          </a:ln>
+          <a:effectLst/>
+        </p:spPr>
+        <p:style>
+          <a:lnRef idx="1">
+            <a:schemeClr val="accent1"/>
+          </a:lnRef>
+          <a:fillRef idx="3">
+            <a:schemeClr val="accent1"/>
+          </a:fillRef>
+          <a:effectRef idx="2">
+            <a:schemeClr val="accent1"/>
+          </a:effectRef>
+          <a:fontRef idx="minor">
+            <a:schemeClr val="lt1"/>
+          </a:fontRef>
+        </p:style>
+        <p:txBody>
+          <a:bodyPr rtlCol="0" anchor="ctr"/>
+          <a:lstStyle/>
+          <a:p>
+            <a:pPr algn="ctr"/>
+          </a:p>
+        </p:txBody>
+      </p:sp>
+      <p:sp>
+        <p:nvSpPr>
+          <p:cNvPr id="17" name="Rectangle 16"/>
+          <p:cNvSpPr/>
+          <p:nvPr/>
+        </p:nvSpPr>
+        <p:spPr>
+          <a:xfrm>
+            <a:off x="7891271" y="2423160"/>
+            <a:ext cx="3346704" cy="50800"/>
+          </a:xfrm>
+          <a:prstGeom prst="rect">
+            <a:avLst/>
+          </a:prstGeom>
+          <a:solidFill>
+            <a:srgbClr val="C08A2E"/>
+          </a:solidFill>
+          <a:ln>
+            <a:noFill/>
+          </a:ln>
+          <a:effectLst/>
+        </p:spPr>
+        <p:style>
+          <a:lnRef idx="1">
+            <a:schemeClr val="accent1"/>
+          </a:lnRef>
+          <a:fillRef idx="3">
+            <a:schemeClr val="accent1"/>
+          </a:fillRef>
+          <a:effectRef idx="2">
+            <a:schemeClr val="accent1"/>
+          </a:effectRef>
+          <a:fontRef idx="minor">
+            <a:schemeClr val="lt1"/>
+          </a:fontRef>
+        </p:style>
+        <p:txBody>
+          <a:bodyPr rtlCol="0" anchor="ctr"/>
+          <a:lstStyle/>
+          <a:p>
+            <a:pPr algn="ctr"/>
+          </a:p>
+        </p:txBody>
+      </p:sp>
+      <p:sp>
+        <p:nvSpPr>
+          <p:cNvPr id="18" name="TextBox 17"/>
+          <p:cNvSpPr txBox="1"/>
+          <p:nvPr/>
+        </p:nvSpPr>
+        <p:spPr>
+          <a:xfrm>
+            <a:off x="8119871" y="2651760"/>
+            <a:ext cx="2926080" cy="320040"/>
+          </a:xfrm>
+          <a:prstGeom prst="rect">
+            <a:avLst/>
+          </a:prstGeom>
+          <a:noFill/>
+        </p:spPr>
+        <p:txBody>
+          <a:bodyPr wrap="square" anchor="t">
+            <a:spAutoFit/>
+          </a:bodyPr>
+          <a:lstStyle/>
+          <a:p>
+            <a:pPr algn="l"/>
+            <a:r>
+              <a:rPr sz="1100" b="1">
+                <a:solidFill>
+                  <a:srgbClr val="C08A2E"/>
+                </a:solidFill>
+                <a:latin typeface="Consolas"/>
+              </a:rPr>
+              <a:t>DECIDE WITH THE DATA</a:t>
+            </a:r>
+          </a:p>
+        </p:txBody>
+      </p:sp>
+      <p:sp>
+        <p:nvSpPr>
+          <p:cNvPr id="19" name="TextBox 18"/>
+          <p:cNvSpPr txBox="1"/>
+          <p:nvPr/>
+        </p:nvSpPr>
+        <p:spPr>
+          <a:xfrm>
+            <a:off x="8119871" y="3063240"/>
+            <a:ext cx="2926080" cy="1828800"/>
+          </a:xfrm>
+          <a:prstGeom prst="rect">
+            <a:avLst/>
+          </a:prstGeom>
+          <a:noFill/>
+        </p:spPr>
+        <p:txBody>
+          <a:bodyPr wrap="square" anchor="t">
+            <a:spAutoFit/>
+          </a:bodyPr>
+          <a:lstStyle/>
+          <a:p>
+            <a:pPr algn="l"/>
+            <a:r>
+              <a:rPr sz="1200" b="0">
+                <a:solidFill>
+                  <a:srgbClr val="1F3243"/>
+                </a:solidFill>
+                <a:latin typeface="Segoe UI"/>
+              </a:rPr>
+              <a:t>Ranking households for contact.
+This stops being a technology question.
+Arrears touches somebody's housing,
+and that needs governance before it
+needs a model.</a:t>
+            </a:r>
+          </a:p>
+        </p:txBody>
+      </p:sp>
+      <p:sp>
+        <p:nvSpPr>
+          <p:cNvPr id="20" name="TextBox 19"/>
+          <p:cNvSpPr txBox="1"/>
+          <p:nvPr/>
+        </p:nvSpPr>
+        <p:spPr>
+          <a:xfrm>
+            <a:off x="8119871" y="4828032"/>
+            <a:ext cx="2926080" cy="274320"/>
+          </a:xfrm>
+          <a:prstGeom prst="rect">
+            <a:avLst/>
+          </a:prstGeom>
+          <a:noFill/>
+        </p:spPr>
+        <p:txBody>
+          <a:bodyPr wrap="square" anchor="t">
+            <a:spAutoFit/>
+          </a:bodyPr>
+          <a:lstStyle/>
+          <a:p>
+            <a:pPr algn="l"/>
+            <a:r>
+              <a:rPr sz="1000" b="1">
+                <a:solidFill>
+                  <a:srgbClr val="64748B"/>
+                </a:solidFill>
+                <a:latin typeface="Consolas"/>
+              </a:rPr>
+              <a:t>Not without a policy owner</a:t>
+            </a:r>
+          </a:p>
+        </p:txBody>
+      </p:sp>
+      <p:sp>
+        <p:nvSpPr>
+          <p:cNvPr id="21" name="Rectangle 20"/>
+          <p:cNvSpPr/>
+          <p:nvPr/>
+        </p:nvSpPr>
+        <p:spPr>
+          <a:xfrm>
+            <a:off x="868680" y="5394960"/>
+            <a:ext cx="10424160" cy="1234440"/>
+          </a:xfrm>
+          <a:prstGeom prst="rect">
+            <a:avLst/>
+          </a:prstGeom>
+          <a:solidFill>
+            <a:srgbClr val="F7EEED"/>
+          </a:solidFill>
+          <a:ln>
+            <a:noFill/>
+          </a:ln>
+          <a:effectLst/>
+        </p:spPr>
+        <p:style>
+          <a:lnRef idx="1">
+            <a:schemeClr val="accent1"/>
+          </a:lnRef>
+          <a:fillRef idx="3">
+            <a:schemeClr val="accent1"/>
+          </a:fillRef>
+          <a:effectRef idx="2">
+            <a:schemeClr val="accent1"/>
+          </a:effectRef>
+          <a:fontRef idx="minor">
+            <a:schemeClr val="lt1"/>
+          </a:fontRef>
+        </p:style>
+        <p:txBody>
+          <a:bodyPr rtlCol="0" anchor="ctr"/>
+          <a:lstStyle/>
+          <a:p>
+            <a:pPr algn="ctr"/>
+          </a:p>
+        </p:txBody>
+      </p:sp>
+      <p:sp>
+        <p:nvSpPr>
+          <p:cNvPr id="22" name="TextBox 21"/>
+          <p:cNvSpPr txBox="1"/>
+          <p:nvPr/>
+        </p:nvSpPr>
+        <p:spPr>
+          <a:xfrm>
+            <a:off x="1143000" y="5577840"/>
+            <a:ext cx="9966960" cy="914400"/>
           </a:xfrm>
           <a:prstGeom prst="rect">
             <a:avLst/>
@@ -6686,11 +6236,23 @@
             <a:r>
               <a:rPr sz="1500" b="1">
                 <a:solidFill>
+                  <a:srgbClr val="B3423A"/>
+                </a:solidFill>
+                <a:latin typeface="Georgia"/>
+              </a:rPr>
+              <a:t>The guardrail that matters here.  </a:t>
+            </a:r>
+          </a:p>
+          <a:p>
+            <a:pPr algn="l"/>
+            <a:r>
+              <a:rPr sz="1500" b="0">
+                <a:solidFill>
                   <a:srgbClr val="1F3243"/>
                 </a:solidFill>
                 <a:latin typeface="Georgia"/>
               </a:rPr>
-              <a:t>Kickoff: week of 14 September 2026</a:t>
+              <a:t>A household with a balance, a household we hold no data for, and a household outside the extract are three different things. Only the first is a finding. Any layer that lets them collapse into one list will eventually put the wrong name on it.</a:t>
             </a:r>
           </a:p>
         </p:txBody>
@@ -6709,7 +6271,7 @@
     <p:bg>
       <p:bgPr>
         <a:solidFill>
-          <a:srgbClr val="1F3243"/>
+          <a:srgbClr val="FFFFFF"/>
         </a:solidFill>
         <a:effectLst/>
       </p:bgPr>
@@ -6729,29 +6291,29 @@
         </p:nvSpPr>
         <p:spPr>
           <a:xfrm>
-            <a:off x="914400" y="2651760"/>
-            <a:ext cx="10332720" cy="365760"/>
-          </a:xfrm>
-          <a:prstGeom prst="rect">
-            <a:avLst/>
-          </a:prstGeom>
-          <a:noFill/>
-        </p:spPr>
-        <p:txBody>
-          <a:bodyPr wrap="square" anchor="t">
-            <a:spAutoFit/>
-          </a:bodyPr>
-          <a:lstStyle/>
-          <a:p>
-            <a:pPr algn="l"/>
-            <a:r>
-              <a:rPr sz="1200" b="1">
-                <a:solidFill>
-                  <a:srgbClr val="7FC4BE"/>
+            <a:off x="822960" y="502920"/>
+            <a:ext cx="10515600" cy="320040"/>
+          </a:xfrm>
+          <a:prstGeom prst="rect">
+            <a:avLst/>
+          </a:prstGeom>
+          <a:noFill/>
+        </p:spPr>
+        <p:txBody>
+          <a:bodyPr wrap="square" anchor="t">
+            <a:spAutoFit/>
+          </a:bodyPr>
+          <a:lstStyle/>
+          <a:p>
+            <a:pPr algn="l"/>
+            <a:r>
+              <a:rPr sz="1100" b="1">
+                <a:solidFill>
+                  <a:srgbClr val="2F6F6B"/>
                 </a:solidFill>
                 <a:latin typeface="Consolas"/>
               </a:rPr>
-              <a:t>WHAT WE ARE ASKING FOR</a:t>
+              <a:t>BEYOND THIS ENGAGEMENT</a:t>
             </a:r>
           </a:p>
         </p:txBody>
@@ -6764,84 +6326,432 @@
         </p:nvSpPr>
         <p:spPr>
           <a:xfrm>
-            <a:off x="914400" y="3108960"/>
-            <a:ext cx="10058400" cy="1280160"/>
-          </a:xfrm>
-          <a:prstGeom prst="rect">
-            <a:avLst/>
-          </a:prstGeom>
-          <a:noFill/>
-        </p:spPr>
-        <p:txBody>
-          <a:bodyPr wrap="square" anchor="t">
-            <a:spAutoFit/>
-          </a:bodyPr>
-          <a:lstStyle/>
-          <a:p>
-            <a:pPr algn="l"/>
-            <a:r>
-              <a:rPr sz="3400" b="0">
-                <a:solidFill>
-                  <a:srgbClr val="FFFFFF"/>
+            <a:off x="822960" y="868680"/>
+            <a:ext cx="10515600" cy="731520"/>
+          </a:xfrm>
+          <a:prstGeom prst="rect">
+            <a:avLst/>
+          </a:prstGeom>
+          <a:noFill/>
+        </p:spPr>
+        <p:txBody>
+          <a:bodyPr wrap="square" anchor="t">
+            <a:spAutoFit/>
+          </a:bodyPr>
+          <a:lstStyle/>
+          <a:p>
+            <a:pPr algn="l"/>
+            <a:r>
+              <a:rPr sz="3200" b="0">
+                <a:solidFill>
+                  <a:srgbClr val="1F3243"/>
                 </a:solidFill>
                 <a:latin typeface="Georgia"/>
               </a:rPr>
-              <a:t>The two answers that shape everything else</a:t>
-            </a:r>
-          </a:p>
-        </p:txBody>
-      </p:sp>
-      <p:sp>
-        <p:nvSpPr>
-          <p:cNvPr id="4" name="TextBox 3"/>
-          <p:cNvSpPr txBox="1"/>
-          <p:nvPr/>
-        </p:nvSpPr>
-        <p:spPr>
-          <a:xfrm>
-            <a:off x="914400" y="4343400"/>
-            <a:ext cx="9692640" cy="1554480"/>
-          </a:xfrm>
-          <a:prstGeom prst="rect">
-            <a:avLst/>
-          </a:prstGeom>
-          <a:noFill/>
-        </p:spPr>
-        <p:txBody>
-          <a:bodyPr wrap="square" anchor="t">
-            <a:spAutoFit/>
-          </a:bodyPr>
-          <a:lstStyle/>
-          <a:p>
-            <a:pPr algn="l">
-              <a:spcAft>
-                <a:spcPts val="1400"/>
-              </a:spcAft>
-            </a:pPr>
-            <a:r>
-              <a:rPr sz="1700" b="0">
-                <a:solidFill>
-                  <a:srgbClr val="B4C1C2"/>
+              <a:t>What the AI piece actually costs you</a:t>
+            </a:r>
+          </a:p>
+        </p:txBody>
+      </p:sp>
+      <p:sp>
+        <p:nvSpPr>
+          <p:cNvPr id="4" name="Rectangle 3"/>
+          <p:cNvSpPr/>
+          <p:nvPr/>
+        </p:nvSpPr>
+        <p:spPr>
+          <a:xfrm>
+            <a:off x="822960" y="1691640"/>
+            <a:ext cx="1097280" cy="38100"/>
+          </a:xfrm>
+          <a:prstGeom prst="rect">
+            <a:avLst/>
+          </a:prstGeom>
+          <a:solidFill>
+            <a:srgbClr val="2F6F6B"/>
+          </a:solidFill>
+          <a:ln>
+            <a:noFill/>
+          </a:ln>
+          <a:effectLst/>
+        </p:spPr>
+        <p:style>
+          <a:lnRef idx="1">
+            <a:schemeClr val="accent1"/>
+          </a:lnRef>
+          <a:fillRef idx="3">
+            <a:schemeClr val="accent1"/>
+          </a:fillRef>
+          <a:effectRef idx="2">
+            <a:schemeClr val="accent1"/>
+          </a:effectRef>
+          <a:fontRef idx="minor">
+            <a:schemeClr val="lt1"/>
+          </a:fontRef>
+        </p:style>
+        <p:txBody>
+          <a:bodyPr rtlCol="0" anchor="ctr"/>
+          <a:lstStyle/>
+          <a:p>
+            <a:pPr algn="ctr"/>
+          </a:p>
+        </p:txBody>
+      </p:sp>
+      <p:sp>
+        <p:nvSpPr>
+          <p:cNvPr id="5" name="TextBox 4"/>
+          <p:cNvSpPr txBox="1"/>
+          <p:nvPr/>
+        </p:nvSpPr>
+        <p:spPr>
+          <a:xfrm>
+            <a:off x="868680" y="2103120"/>
+            <a:ext cx="3291840" cy="457200"/>
+          </a:xfrm>
+          <a:prstGeom prst="rect">
+            <a:avLst/>
+          </a:prstGeom>
+          <a:noFill/>
+        </p:spPr>
+        <p:txBody>
+          <a:bodyPr wrap="square" anchor="t">
+            <a:spAutoFit/>
+          </a:bodyPr>
+          <a:lstStyle/>
+          <a:p>
+            <a:pPr algn="l"/>
+            <a:r>
+              <a:rPr sz="1500" b="1">
+                <a:solidFill>
+                  <a:srgbClr val="1F3243"/>
+                </a:solidFill>
+                <a:latin typeface="Segoe UI"/>
+              </a:rPr>
+              <a:t>Two tenant switches, not one</a:t>
+            </a:r>
+          </a:p>
+        </p:txBody>
+      </p:sp>
+      <p:sp>
+        <p:nvSpPr>
+          <p:cNvPr id="6" name="TextBox 5"/>
+          <p:cNvSpPr txBox="1"/>
+          <p:nvPr/>
+        </p:nvSpPr>
+        <p:spPr>
+          <a:xfrm>
+            <a:off x="4297680" y="2103120"/>
+            <a:ext cx="7040880" cy="868680"/>
+          </a:xfrm>
+          <a:prstGeom prst="rect">
+            <a:avLst/>
+          </a:prstGeom>
+          <a:noFill/>
+        </p:spPr>
+        <p:txBody>
+          <a:bodyPr wrap="square" anchor="t">
+            <a:spAutoFit/>
+          </a:bodyPr>
+          <a:lstStyle/>
+          <a:p>
+            <a:pPr algn="l"/>
+            <a:r>
+              <a:rPr sz="1300" b="0">
+                <a:solidFill>
+                  <a:srgbClr val="64748B"/>
+                </a:solidFill>
+                <a:latin typeface="Segoe UI"/>
+              </a:rPr>
+              <a:t>A Fabric data agent needs Copilot and Azure AI enabled, and separately needs data permitted to leave the capacity's geography for processing. For an Ontario housing provider the second is a residency decision, not a checkbox.</a:t>
+            </a:r>
+          </a:p>
+        </p:txBody>
+      </p:sp>
+      <p:sp>
+        <p:nvSpPr>
+          <p:cNvPr id="7" name="TextBox 6"/>
+          <p:cNvSpPr txBox="1"/>
+          <p:nvPr/>
+        </p:nvSpPr>
+        <p:spPr>
+          <a:xfrm>
+            <a:off x="868680" y="3136391"/>
+            <a:ext cx="3291840" cy="457200"/>
+          </a:xfrm>
+          <a:prstGeom prst="rect">
+            <a:avLst/>
+          </a:prstGeom>
+          <a:noFill/>
+        </p:spPr>
+        <p:txBody>
+          <a:bodyPr wrap="square" anchor="t">
+            <a:spAutoFit/>
+          </a:bodyPr>
+          <a:lstStyle/>
+          <a:p>
+            <a:pPr algn="l"/>
+            <a:r>
+              <a:rPr sz="1500" b="1">
+                <a:solidFill>
+                  <a:srgbClr val="1F3243"/>
+                </a:solidFill>
+                <a:latin typeface="Segoe UI"/>
+              </a:rPr>
+              <a:t>Grounding is engineering, not prompting</a:t>
+            </a:r>
+          </a:p>
+        </p:txBody>
+      </p:sp>
+      <p:sp>
+        <p:nvSpPr>
+          <p:cNvPr id="8" name="TextBox 7"/>
+          <p:cNvSpPr txBox="1"/>
+          <p:nvPr/>
+        </p:nvSpPr>
+        <p:spPr>
+          <a:xfrm>
+            <a:off x="4297680" y="3136391"/>
+            <a:ext cx="7040880" cy="868680"/>
+          </a:xfrm>
+          <a:prstGeom prst="rect">
+            <a:avLst/>
+          </a:prstGeom>
+          <a:noFill/>
+        </p:spPr>
+        <p:txBody>
+          <a:bodyPr wrap="square" anchor="t">
+            <a:spAutoFit/>
+          </a:bodyPr>
+          <a:lstStyle/>
+          <a:p>
+            <a:pPr algn="l"/>
+            <a:r>
+              <a:rPr sz="1300" b="0">
+                <a:solidFill>
+                  <a:srgbClr val="64748B"/>
+                </a:solidFill>
+                <a:latin typeface="Segoe UI"/>
+              </a:rPr>
+              <a:t>The pipeline decides what the model may see, and hands it a bounded evidence envelope. That work sits in the Gold layer and the contract between them — which is why it comes after the MVP, not instead of it.</a:t>
+            </a:r>
+          </a:p>
+        </p:txBody>
+      </p:sp>
+      <p:sp>
+        <p:nvSpPr>
+          <p:cNvPr id="9" name="TextBox 8"/>
+          <p:cNvSpPr txBox="1"/>
+          <p:nvPr/>
+        </p:nvSpPr>
+        <p:spPr>
+          <a:xfrm>
+            <a:off x="868680" y="4169663"/>
+            <a:ext cx="3291840" cy="457200"/>
+          </a:xfrm>
+          <a:prstGeom prst="rect">
+            <a:avLst/>
+          </a:prstGeom>
+          <a:noFill/>
+        </p:spPr>
+        <p:txBody>
+          <a:bodyPr wrap="square" anchor="t">
+            <a:spAutoFit/>
+          </a:bodyPr>
+          <a:lstStyle/>
+          <a:p>
+            <a:pPr algn="l"/>
+            <a:r>
+              <a:rPr sz="1500" b="1">
+                <a:solidFill>
+                  <a:srgbClr val="1F3243"/>
+                </a:solidFill>
+                <a:latin typeface="Segoe UI"/>
+              </a:rPr>
+              <a:t>Validate the contract, not just the values</a:t>
+            </a:r>
+          </a:p>
+        </p:txBody>
+      </p:sp>
+      <p:sp>
+        <p:nvSpPr>
+          <p:cNvPr id="10" name="TextBox 9"/>
+          <p:cNvSpPr txBox="1"/>
+          <p:nvPr/>
+        </p:nvSpPr>
+        <p:spPr>
+          <a:xfrm>
+            <a:off x="4297680" y="4169663"/>
+            <a:ext cx="7040880" cy="868680"/>
+          </a:xfrm>
+          <a:prstGeom prst="rect">
+            <a:avLst/>
+          </a:prstGeom>
+          <a:noFill/>
+        </p:spPr>
+        <p:txBody>
+          <a:bodyPr wrap="square" anchor="t">
+            <a:spAutoFit/>
+          </a:bodyPr>
+          <a:lstStyle/>
+          <a:p>
+            <a:pPr algn="l"/>
+            <a:r>
+              <a:rPr sz="1300" b="0">
+                <a:solidFill>
+                  <a:srgbClr val="64748B"/>
+                </a:solidFill>
+                <a:latin typeface="Segoe UI"/>
+              </a:rPr>
+              <a:t>In an earlier build, an agent given no evidence returned a perfectly valid document citing a source that did not exist. Schema validation passed it. Only a second, independent check caught it.</a:t>
+            </a:r>
+          </a:p>
+        </p:txBody>
+      </p:sp>
+      <p:sp>
+        <p:nvSpPr>
+          <p:cNvPr id="11" name="TextBox 10"/>
+          <p:cNvSpPr txBox="1"/>
+          <p:nvPr/>
+        </p:nvSpPr>
+        <p:spPr>
+          <a:xfrm>
+            <a:off x="868680" y="5202936"/>
+            <a:ext cx="3291840" cy="457200"/>
+          </a:xfrm>
+          <a:prstGeom prst="rect">
+            <a:avLst/>
+          </a:prstGeom>
+          <a:noFill/>
+        </p:spPr>
+        <p:txBody>
+          <a:bodyPr wrap="square" anchor="t">
+            <a:spAutoFit/>
+          </a:bodyPr>
+          <a:lstStyle/>
+          <a:p>
+            <a:pPr algn="l"/>
+            <a:r>
+              <a:rPr sz="1500" b="1">
+                <a:solidFill>
+                  <a:srgbClr val="1F3243"/>
+                </a:solidFill>
+                <a:latin typeface="Segoe UI"/>
+              </a:rPr>
+              <a:t>A refusal has to be expressible</a:t>
+            </a:r>
+          </a:p>
+        </p:txBody>
+      </p:sp>
+      <p:sp>
+        <p:nvSpPr>
+          <p:cNvPr id="12" name="TextBox 11"/>
+          <p:cNvSpPr txBox="1"/>
+          <p:nvPr/>
+        </p:nvSpPr>
+        <p:spPr>
+          <a:xfrm>
+            <a:off x="4297680" y="5202936"/>
+            <a:ext cx="7040880" cy="868680"/>
+          </a:xfrm>
+          <a:prstGeom prst="rect">
+            <a:avLst/>
+          </a:prstGeom>
+          <a:noFill/>
+        </p:spPr>
+        <p:txBody>
+          <a:bodyPr wrap="square" anchor="t">
+            <a:spAutoFit/>
+          </a:bodyPr>
+          <a:lstStyle/>
+          <a:p>
+            <a:pPr algn="l"/>
+            <a:r>
+              <a:rPr sz="1300" b="0">
+                <a:solidFill>
+                  <a:srgbClr val="64748B"/>
+                </a:solidFill>
+                <a:latin typeface="Segoe UI"/>
+              </a:rPr>
+              <a:t>If the only valid answer shape is an answer, a model will invent one. It needs a lawful way to return nothing.</a:t>
+            </a:r>
+          </a:p>
+        </p:txBody>
+      </p:sp>
+      <p:sp>
+        <p:nvSpPr>
+          <p:cNvPr id="13" name="Rectangle 12"/>
+          <p:cNvSpPr/>
+          <p:nvPr/>
+        </p:nvSpPr>
+        <p:spPr>
+          <a:xfrm>
+            <a:off x="868680" y="6080760"/>
+            <a:ext cx="10424160" cy="658368"/>
+          </a:xfrm>
+          <a:prstGeom prst="rect">
+            <a:avLst/>
+          </a:prstGeom>
+          <a:solidFill>
+            <a:srgbClr val="ECF0F0"/>
+          </a:solidFill>
+          <a:ln>
+            <a:noFill/>
+          </a:ln>
+          <a:effectLst/>
+        </p:spPr>
+        <p:style>
+          <a:lnRef idx="1">
+            <a:schemeClr val="accent1"/>
+          </a:lnRef>
+          <a:fillRef idx="3">
+            <a:schemeClr val="accent1"/>
+          </a:fillRef>
+          <a:effectRef idx="2">
+            <a:schemeClr val="accent1"/>
+          </a:effectRef>
+          <a:fontRef idx="minor">
+            <a:schemeClr val="lt1"/>
+          </a:fontRef>
+        </p:style>
+        <p:txBody>
+          <a:bodyPr rtlCol="0" anchor="ctr"/>
+          <a:lstStyle/>
+          <a:p>
+            <a:pPr algn="ctr"/>
+          </a:p>
+        </p:txBody>
+      </p:sp>
+      <p:sp>
+        <p:nvSpPr>
+          <p:cNvPr id="14" name="TextBox 13"/>
+          <p:cNvSpPr txBox="1"/>
+          <p:nvPr/>
+        </p:nvSpPr>
+        <p:spPr>
+          <a:xfrm>
+            <a:off x="1143000" y="6217920"/>
+            <a:ext cx="9966960" cy="411480"/>
+          </a:xfrm>
+          <a:prstGeom prst="rect">
+            <a:avLst/>
+          </a:prstGeom>
+          <a:noFill/>
+        </p:spPr>
+        <p:txBody>
+          <a:bodyPr wrap="square" anchor="t">
+            <a:spAutoFit/>
+          </a:bodyPr>
+          <a:lstStyle/>
+          <a:p>
+            <a:pPr algn="l"/>
+            <a:r>
+              <a:rPr sz="1400" b="0">
+                <a:solidFill>
+                  <a:srgbClr val="1F3243"/>
                 </a:solidFill>
                 <a:latin typeface="Georgia"/>
               </a:rPr>
-              <a:t>Which system is the system of record for arrears balances, and which for unit vacancy — and what integration surface each one offers.</a:t>
-            </a:r>
-          </a:p>
-          <a:p>
-            <a:pPr algn="l">
-              <a:spcAft>
-                <a:spcPts val="1400"/>
-              </a:spcAft>
-            </a:pPr>
-            <a:r>
-              <a:rPr sz="1700" b="0">
-                <a:solidFill>
-                  <a:srgbClr val="B4C1C2"/>
-                </a:solidFill>
-                <a:latin typeface="Georgia"/>
-              </a:rPr>
-              <a:t>How current the data has to be for the decision the business actually makes. Daily, intraday, or near real time.</a:t>
+              <a:t>None of this is a reason not to do it. It is the reason to do the medallion and the semantic model first.</a:t>
             </a:r>
           </a:p>
         </p:txBody>
@@ -6880,7 +6790,7 @@
         </p:nvSpPr>
         <p:spPr>
           <a:xfrm>
-            <a:off x="822960" y="384048"/>
+            <a:off x="822960" y="502920"/>
             <a:ext cx="10515600" cy="320040"/>
           </a:xfrm>
           <a:prstGeom prst="rect">
@@ -6902,7 +6812,7 @@
                 </a:solidFill>
                 <a:latin typeface="Consolas"/>
               </a:rPr>
-              <a:t>APPENDIX  ·  REPORT PAGE 1</a:t>
+              <a:t>ITEM 10</a:t>
             </a:r>
           </a:p>
         </p:txBody>
@@ -6915,57 +6825,77 @@
         </p:nvSpPr>
         <p:spPr>
           <a:xfrm>
-            <a:off x="822960" y="713232"/>
-            <a:ext cx="10515600" cy="365760"/>
-          </a:xfrm>
-          <a:prstGeom prst="rect">
-            <a:avLst/>
-          </a:prstGeom>
-          <a:noFill/>
-        </p:spPr>
-        <p:txBody>
-          <a:bodyPr wrap="square" anchor="t">
-            <a:spAutoFit/>
-          </a:bodyPr>
-          <a:lstStyle/>
-          <a:p>
-            <a:pPr algn="l"/>
-            <a:r>
-              <a:rPr sz="1500" b="0">
+            <a:off x="822960" y="868680"/>
+            <a:ext cx="10515600" cy="731520"/>
+          </a:xfrm>
+          <a:prstGeom prst="rect">
+            <a:avLst/>
+          </a:prstGeom>
+          <a:noFill/>
+        </p:spPr>
+        <p:txBody>
+          <a:bodyPr wrap="square" anchor="t">
+            <a:spAutoFit/>
+          </a:bodyPr>
+          <a:lstStyle/>
+          <a:p>
+            <a:pPr algn="l"/>
+            <a:r>
+              <a:rPr sz="3200" b="0">
                 <a:solidFill>
                   <a:srgbClr val="1F3243"/>
                 </a:solidFill>
                 <a:latin typeface="Georgia"/>
               </a:rPr>
-              <a:t>Arrears overview — portfolio position, trend, aging, concentration</a:t>
-            </a:r>
-          </a:p>
-        </p:txBody>
-      </p:sp>
-      <p:pic>
-        <p:nvPicPr>
-          <p:cNvPr id="4" name="Picture 3" descr="final1.png"/>
-          <p:cNvPicPr>
-            <a:picLocks noChangeAspect="1"/>
-          </p:cNvPicPr>
-          <p:nvPr/>
-        </p:nvPicPr>
-        <p:blipFill>
-          <a:blip r:embed="rId2"/>
-          <a:stretch>
-            <a:fillRect/>
-          </a:stretch>
-        </p:blipFill>
-        <p:spPr>
-          <a:xfrm>
-            <a:off x="822960" y="1280160"/>
-            <a:ext cx="10515600" cy="3783293"/>
-          </a:xfrm>
-          <a:prstGeom prst="rect">
-            <a:avLst/>
-          </a:prstGeom>
-        </p:spPr>
-      </p:pic>
+              <a:t>Pre-kickoff checklist</a:t>
+            </a:r>
+          </a:p>
+        </p:txBody>
+      </p:sp>
+      <p:sp>
+        <p:nvSpPr>
+          <p:cNvPr id="4" name="Rectangle 3"/>
+          <p:cNvSpPr/>
+          <p:nvPr/>
+        </p:nvSpPr>
+        <p:spPr>
+          <a:xfrm>
+            <a:off x="822960" y="1691640"/>
+            <a:ext cx="1097280" cy="38100"/>
+          </a:xfrm>
+          <a:prstGeom prst="rect">
+            <a:avLst/>
+          </a:prstGeom>
+          <a:solidFill>
+            <a:srgbClr val="2F6F6B"/>
+          </a:solidFill>
+          <a:ln>
+            <a:noFill/>
+          </a:ln>
+          <a:effectLst/>
+        </p:spPr>
+        <p:style>
+          <a:lnRef idx="1">
+            <a:schemeClr val="accent1"/>
+          </a:lnRef>
+          <a:fillRef idx="3">
+            <a:schemeClr val="accent1"/>
+          </a:fillRef>
+          <a:effectRef idx="2">
+            <a:schemeClr val="accent1"/>
+          </a:effectRef>
+          <a:fontRef idx="minor">
+            <a:schemeClr val="lt1"/>
+          </a:fontRef>
+        </p:style>
+        <p:txBody>
+          <a:bodyPr rtlCol="0" anchor="ctr"/>
+          <a:lstStyle/>
+          <a:p>
+            <a:pPr algn="ctr"/>
+          </a:p>
+        </p:txBody>
+      </p:sp>
       <p:sp>
         <p:nvSpPr>
           <p:cNvPr id="5" name="TextBox 4"/>
@@ -6974,8 +6904,122 @@
         </p:nvSpPr>
         <p:spPr>
           <a:xfrm>
-            <a:off x="822960" y="6446520"/>
-            <a:ext cx="10515600" cy="320040"/>
+            <a:off x="868680" y="2011680"/>
+            <a:ext cx="10424160" cy="320040"/>
+          </a:xfrm>
+          <a:prstGeom prst="rect">
+            <a:avLst/>
+          </a:prstGeom>
+          <a:noFill/>
+        </p:spPr>
+        <p:txBody>
+          <a:bodyPr wrap="square" anchor="t">
+            <a:spAutoFit/>
+          </a:bodyPr>
+          <a:lstStyle/>
+          <a:p>
+            <a:pPr algn="l"/>
+            <a:r>
+              <a:rPr sz="1400" b="0">
+                <a:solidFill>
+                  <a:srgbClr val="64748B"/>
+                </a:solidFill>
+                <a:latin typeface="Georgia"/>
+              </a:rPr>
+              <a:t>An owner and a date against each, before we leave the room.</a:t>
+            </a:r>
+          </a:p>
+        </p:txBody>
+      </p:sp>
+      <p:sp>
+        <p:nvSpPr>
+          <p:cNvPr id="6" name="Rectangle 5"/>
+          <p:cNvSpPr/>
+          <p:nvPr/>
+        </p:nvSpPr>
+        <p:spPr>
+          <a:xfrm>
+            <a:off x="896112" y="2551176"/>
+            <a:ext cx="146304" cy="146304"/>
+          </a:xfrm>
+          <a:prstGeom prst="rect">
+            <a:avLst/>
+          </a:prstGeom>
+          <a:noFill/>
+          <a:ln w="15875">
+            <a:solidFill>
+              <a:srgbClr val="2F6F6B"/>
+            </a:solidFill>
+          </a:ln>
+          <a:effectLst/>
+        </p:spPr>
+        <p:style>
+          <a:lnRef idx="1">
+            <a:schemeClr val="accent1"/>
+          </a:lnRef>
+          <a:fillRef idx="3">
+            <a:schemeClr val="accent1"/>
+          </a:fillRef>
+          <a:effectRef idx="2">
+            <a:schemeClr val="accent1"/>
+          </a:effectRef>
+          <a:fontRef idx="minor">
+            <a:schemeClr val="lt1"/>
+          </a:fontRef>
+        </p:style>
+        <p:txBody>
+          <a:bodyPr rtlCol="0" anchor="ctr"/>
+          <a:lstStyle/>
+          <a:p>
+            <a:pPr algn="ctr"/>
+          </a:p>
+        </p:txBody>
+      </p:sp>
+      <p:sp>
+        <p:nvSpPr>
+          <p:cNvPr id="7" name="TextBox 6"/>
+          <p:cNvSpPr txBox="1"/>
+          <p:nvPr/>
+        </p:nvSpPr>
+        <p:spPr>
+          <a:xfrm>
+            <a:off x="1234440" y="2478024"/>
+            <a:ext cx="7589520" cy="365760"/>
+          </a:xfrm>
+          <a:prstGeom prst="rect">
+            <a:avLst/>
+          </a:prstGeom>
+          <a:noFill/>
+        </p:spPr>
+        <p:txBody>
+          <a:bodyPr wrap="square" anchor="t">
+            <a:spAutoFit/>
+          </a:bodyPr>
+          <a:lstStyle/>
+          <a:p>
+            <a:pPr algn="l"/>
+            <a:r>
+              <a:rPr sz="1400" b="0">
+                <a:solidFill>
+                  <a:srgbClr val="1F3243"/>
+                </a:solidFill>
+                <a:latin typeface="Segoe UI"/>
+              </a:rPr>
+              <a:t>TCHC product owner named, with allocation confirmed for the engagement</a:t>
+            </a:r>
+          </a:p>
+        </p:txBody>
+      </p:sp>
+      <p:sp>
+        <p:nvSpPr>
+          <p:cNvPr id="8" name="TextBox 7"/>
+          <p:cNvSpPr txBox="1"/>
+          <p:nvPr/>
+        </p:nvSpPr>
+        <p:spPr>
+          <a:xfrm>
+            <a:off x="9052560" y="2478024"/>
+            <a:ext cx="1097280" cy="365760"/>
           </a:xfrm>
           <a:prstGeom prst="rect">
             <a:avLst/>
@@ -6992,11 +7036,1019 @@
             <a:r>
               <a:rPr sz="1100" b="0">
                 <a:solidFill>
-                  <a:srgbClr val="64748B"/>
+                  <a:srgbClr val="C6CFCF"/>
                 </a:solidFill>
                 <a:latin typeface="Consolas"/>
               </a:rPr>
-              <a:t>Synthetic data. 120 buildings, 10,568 units, 24 months.</a:t>
+              <a:t>owner</a:t>
+            </a:r>
+          </a:p>
+        </p:txBody>
+      </p:sp>
+      <p:sp>
+        <p:nvSpPr>
+          <p:cNvPr id="9" name="TextBox 8"/>
+          <p:cNvSpPr txBox="1"/>
+          <p:nvPr/>
+        </p:nvSpPr>
+        <p:spPr>
+          <a:xfrm>
+            <a:off x="10332720" y="2478024"/>
+            <a:ext cx="1005840" cy="365760"/>
+          </a:xfrm>
+          <a:prstGeom prst="rect">
+            <a:avLst/>
+          </a:prstGeom>
+          <a:noFill/>
+        </p:spPr>
+        <p:txBody>
+          <a:bodyPr wrap="square" anchor="t">
+            <a:spAutoFit/>
+          </a:bodyPr>
+          <a:lstStyle/>
+          <a:p>
+            <a:pPr algn="l"/>
+            <a:r>
+              <a:rPr sz="1100" b="0">
+                <a:solidFill>
+                  <a:srgbClr val="C6CFCF"/>
+                </a:solidFill>
+                <a:latin typeface="Consolas"/>
+              </a:rPr>
+              <a:t>date</a:t>
+            </a:r>
+          </a:p>
+        </p:txBody>
+      </p:sp>
+      <p:sp>
+        <p:nvSpPr>
+          <p:cNvPr id="10" name="Rectangle 9"/>
+          <p:cNvSpPr/>
+          <p:nvPr/>
+        </p:nvSpPr>
+        <p:spPr>
+          <a:xfrm>
+            <a:off x="896112" y="3063240"/>
+            <a:ext cx="146304" cy="146304"/>
+          </a:xfrm>
+          <a:prstGeom prst="rect">
+            <a:avLst/>
+          </a:prstGeom>
+          <a:noFill/>
+          <a:ln w="15875">
+            <a:solidFill>
+              <a:srgbClr val="2F6F6B"/>
+            </a:solidFill>
+          </a:ln>
+          <a:effectLst/>
+        </p:spPr>
+        <p:style>
+          <a:lnRef idx="1">
+            <a:schemeClr val="accent1"/>
+          </a:lnRef>
+          <a:fillRef idx="3">
+            <a:schemeClr val="accent1"/>
+          </a:fillRef>
+          <a:effectRef idx="2">
+            <a:schemeClr val="accent1"/>
+          </a:effectRef>
+          <a:fontRef idx="minor">
+            <a:schemeClr val="lt1"/>
+          </a:fontRef>
+        </p:style>
+        <p:txBody>
+          <a:bodyPr rtlCol="0" anchor="ctr"/>
+          <a:lstStyle/>
+          <a:p>
+            <a:pPr algn="ctr"/>
+          </a:p>
+        </p:txBody>
+      </p:sp>
+      <p:sp>
+        <p:nvSpPr>
+          <p:cNvPr id="11" name="TextBox 10"/>
+          <p:cNvSpPr txBox="1"/>
+          <p:nvPr/>
+        </p:nvSpPr>
+        <p:spPr>
+          <a:xfrm>
+            <a:off x="1234440" y="2990088"/>
+            <a:ext cx="7589520" cy="365760"/>
+          </a:xfrm>
+          <a:prstGeom prst="rect">
+            <a:avLst/>
+          </a:prstGeom>
+          <a:noFill/>
+        </p:spPr>
+        <p:txBody>
+          <a:bodyPr wrap="square" anchor="t">
+            <a:spAutoFit/>
+          </a:bodyPr>
+          <a:lstStyle/>
+          <a:p>
+            <a:pPr algn="l"/>
+            <a:r>
+              <a:rPr sz="1400" b="0">
+                <a:solidFill>
+                  <a:srgbClr val="1F3243"/>
+                </a:solidFill>
+                <a:latin typeface="Segoe UI"/>
+              </a:rPr>
+              <a:t>Fabric capacity decision — F-SKU size, reservation, Microsoft-hosted or TCHC tenant</a:t>
+            </a:r>
+          </a:p>
+        </p:txBody>
+      </p:sp>
+      <p:sp>
+        <p:nvSpPr>
+          <p:cNvPr id="12" name="TextBox 11"/>
+          <p:cNvSpPr txBox="1"/>
+          <p:nvPr/>
+        </p:nvSpPr>
+        <p:spPr>
+          <a:xfrm>
+            <a:off x="9052560" y="2990088"/>
+            <a:ext cx="1097280" cy="365760"/>
+          </a:xfrm>
+          <a:prstGeom prst="rect">
+            <a:avLst/>
+          </a:prstGeom>
+          <a:noFill/>
+        </p:spPr>
+        <p:txBody>
+          <a:bodyPr wrap="square" anchor="t">
+            <a:spAutoFit/>
+          </a:bodyPr>
+          <a:lstStyle/>
+          <a:p>
+            <a:pPr algn="l"/>
+            <a:r>
+              <a:rPr sz="1100" b="0">
+                <a:solidFill>
+                  <a:srgbClr val="C6CFCF"/>
+                </a:solidFill>
+                <a:latin typeface="Consolas"/>
+              </a:rPr>
+              <a:t>owner</a:t>
+            </a:r>
+          </a:p>
+        </p:txBody>
+      </p:sp>
+      <p:sp>
+        <p:nvSpPr>
+          <p:cNvPr id="13" name="TextBox 12"/>
+          <p:cNvSpPr txBox="1"/>
+          <p:nvPr/>
+        </p:nvSpPr>
+        <p:spPr>
+          <a:xfrm>
+            <a:off x="10332720" y="2990088"/>
+            <a:ext cx="1005840" cy="365760"/>
+          </a:xfrm>
+          <a:prstGeom prst="rect">
+            <a:avLst/>
+          </a:prstGeom>
+          <a:noFill/>
+        </p:spPr>
+        <p:txBody>
+          <a:bodyPr wrap="square" anchor="t">
+            <a:spAutoFit/>
+          </a:bodyPr>
+          <a:lstStyle/>
+          <a:p>
+            <a:pPr algn="l"/>
+            <a:r>
+              <a:rPr sz="1100" b="0">
+                <a:solidFill>
+                  <a:srgbClr val="C6CFCF"/>
+                </a:solidFill>
+                <a:latin typeface="Consolas"/>
+              </a:rPr>
+              <a:t>date</a:t>
+            </a:r>
+          </a:p>
+        </p:txBody>
+      </p:sp>
+      <p:sp>
+        <p:nvSpPr>
+          <p:cNvPr id="14" name="Rectangle 13"/>
+          <p:cNvSpPr/>
+          <p:nvPr/>
+        </p:nvSpPr>
+        <p:spPr>
+          <a:xfrm>
+            <a:off x="896112" y="3575304"/>
+            <a:ext cx="146304" cy="146304"/>
+          </a:xfrm>
+          <a:prstGeom prst="rect">
+            <a:avLst/>
+          </a:prstGeom>
+          <a:noFill/>
+          <a:ln w="15875">
+            <a:solidFill>
+              <a:srgbClr val="2F6F6B"/>
+            </a:solidFill>
+          </a:ln>
+          <a:effectLst/>
+        </p:spPr>
+        <p:style>
+          <a:lnRef idx="1">
+            <a:schemeClr val="accent1"/>
+          </a:lnRef>
+          <a:fillRef idx="3">
+            <a:schemeClr val="accent1"/>
+          </a:fillRef>
+          <a:effectRef idx="2">
+            <a:schemeClr val="accent1"/>
+          </a:effectRef>
+          <a:fontRef idx="minor">
+            <a:schemeClr val="lt1"/>
+          </a:fontRef>
+        </p:style>
+        <p:txBody>
+          <a:bodyPr rtlCol="0" anchor="ctr"/>
+          <a:lstStyle/>
+          <a:p>
+            <a:pPr algn="ctr"/>
+          </a:p>
+        </p:txBody>
+      </p:sp>
+      <p:sp>
+        <p:nvSpPr>
+          <p:cNvPr id="15" name="TextBox 14"/>
+          <p:cNvSpPr txBox="1"/>
+          <p:nvPr/>
+        </p:nvSpPr>
+        <p:spPr>
+          <a:xfrm>
+            <a:off x="1234440" y="3502152"/>
+            <a:ext cx="7589520" cy="365760"/>
+          </a:xfrm>
+          <a:prstGeom prst="rect">
+            <a:avLst/>
+          </a:prstGeom>
+          <a:noFill/>
+        </p:spPr>
+        <p:txBody>
+          <a:bodyPr wrap="square" anchor="t">
+            <a:spAutoFit/>
+          </a:bodyPr>
+          <a:lstStyle/>
+          <a:p>
+            <a:pPr algn="l"/>
+            <a:r>
+              <a:rPr sz="1400" b="0">
+                <a:solidFill>
+                  <a:srgbClr val="1F3243"/>
+                </a:solidFill>
+                <a:latin typeface="Segoe UI"/>
+              </a:rPr>
+              <a:t>Azure subscription, Entra ID groups, administrative access for environment build</a:t>
+            </a:r>
+          </a:p>
+        </p:txBody>
+      </p:sp>
+      <p:sp>
+        <p:nvSpPr>
+          <p:cNvPr id="16" name="TextBox 15"/>
+          <p:cNvSpPr txBox="1"/>
+          <p:nvPr/>
+        </p:nvSpPr>
+        <p:spPr>
+          <a:xfrm>
+            <a:off x="9052560" y="3502152"/>
+            <a:ext cx="1097280" cy="365760"/>
+          </a:xfrm>
+          <a:prstGeom prst="rect">
+            <a:avLst/>
+          </a:prstGeom>
+          <a:noFill/>
+        </p:spPr>
+        <p:txBody>
+          <a:bodyPr wrap="square" anchor="t">
+            <a:spAutoFit/>
+          </a:bodyPr>
+          <a:lstStyle/>
+          <a:p>
+            <a:pPr algn="l"/>
+            <a:r>
+              <a:rPr sz="1100" b="0">
+                <a:solidFill>
+                  <a:srgbClr val="C6CFCF"/>
+                </a:solidFill>
+                <a:latin typeface="Consolas"/>
+              </a:rPr>
+              <a:t>owner</a:t>
+            </a:r>
+          </a:p>
+        </p:txBody>
+      </p:sp>
+      <p:sp>
+        <p:nvSpPr>
+          <p:cNvPr id="17" name="TextBox 16"/>
+          <p:cNvSpPr txBox="1"/>
+          <p:nvPr/>
+        </p:nvSpPr>
+        <p:spPr>
+          <a:xfrm>
+            <a:off x="10332720" y="3502152"/>
+            <a:ext cx="1005840" cy="365760"/>
+          </a:xfrm>
+          <a:prstGeom prst="rect">
+            <a:avLst/>
+          </a:prstGeom>
+          <a:noFill/>
+        </p:spPr>
+        <p:txBody>
+          <a:bodyPr wrap="square" anchor="t">
+            <a:spAutoFit/>
+          </a:bodyPr>
+          <a:lstStyle/>
+          <a:p>
+            <a:pPr algn="l"/>
+            <a:r>
+              <a:rPr sz="1100" b="0">
+                <a:solidFill>
+                  <a:srgbClr val="C6CFCF"/>
+                </a:solidFill>
+                <a:latin typeface="Consolas"/>
+              </a:rPr>
+              <a:t>date</a:t>
+            </a:r>
+          </a:p>
+        </p:txBody>
+      </p:sp>
+      <p:sp>
+        <p:nvSpPr>
+          <p:cNvPr id="18" name="Rectangle 17"/>
+          <p:cNvSpPr/>
+          <p:nvPr/>
+        </p:nvSpPr>
+        <p:spPr>
+          <a:xfrm>
+            <a:off x="896112" y="4087368"/>
+            <a:ext cx="146304" cy="146304"/>
+          </a:xfrm>
+          <a:prstGeom prst="rect">
+            <a:avLst/>
+          </a:prstGeom>
+          <a:noFill/>
+          <a:ln w="15875">
+            <a:solidFill>
+              <a:srgbClr val="2F6F6B"/>
+            </a:solidFill>
+          </a:ln>
+          <a:effectLst/>
+        </p:spPr>
+        <p:style>
+          <a:lnRef idx="1">
+            <a:schemeClr val="accent1"/>
+          </a:lnRef>
+          <a:fillRef idx="3">
+            <a:schemeClr val="accent1"/>
+          </a:fillRef>
+          <a:effectRef idx="2">
+            <a:schemeClr val="accent1"/>
+          </a:effectRef>
+          <a:fontRef idx="minor">
+            <a:schemeClr val="lt1"/>
+          </a:fontRef>
+        </p:style>
+        <p:txBody>
+          <a:bodyPr rtlCol="0" anchor="ctr"/>
+          <a:lstStyle/>
+          <a:p>
+            <a:pPr algn="ctr"/>
+          </a:p>
+        </p:txBody>
+      </p:sp>
+      <p:sp>
+        <p:nvSpPr>
+          <p:cNvPr id="19" name="TextBox 18"/>
+          <p:cNvSpPr txBox="1"/>
+          <p:nvPr/>
+        </p:nvSpPr>
+        <p:spPr>
+          <a:xfrm>
+            <a:off x="1234440" y="4014215"/>
+            <a:ext cx="7589520" cy="365760"/>
+          </a:xfrm>
+          <a:prstGeom prst="rect">
+            <a:avLst/>
+          </a:prstGeom>
+          <a:noFill/>
+        </p:spPr>
+        <p:txBody>
+          <a:bodyPr wrap="square" anchor="t">
+            <a:spAutoFit/>
+          </a:bodyPr>
+          <a:lstStyle/>
+          <a:p>
+            <a:pPr algn="l"/>
+            <a:r>
+              <a:rPr sz="1400" b="0">
+                <a:solidFill>
+                  <a:srgbClr val="1F3243"/>
+                </a:solidFill>
+                <a:latin typeface="Segoe UI"/>
+              </a:rPr>
+              <a:t>Source system access for arrears and vacancy, plus a gateway host if required</a:t>
+            </a:r>
+          </a:p>
+        </p:txBody>
+      </p:sp>
+      <p:sp>
+        <p:nvSpPr>
+          <p:cNvPr id="20" name="TextBox 19"/>
+          <p:cNvSpPr txBox="1"/>
+          <p:nvPr/>
+        </p:nvSpPr>
+        <p:spPr>
+          <a:xfrm>
+            <a:off x="9052560" y="4014215"/>
+            <a:ext cx="1097280" cy="365760"/>
+          </a:xfrm>
+          <a:prstGeom prst="rect">
+            <a:avLst/>
+          </a:prstGeom>
+          <a:noFill/>
+        </p:spPr>
+        <p:txBody>
+          <a:bodyPr wrap="square" anchor="t">
+            <a:spAutoFit/>
+          </a:bodyPr>
+          <a:lstStyle/>
+          <a:p>
+            <a:pPr algn="l"/>
+            <a:r>
+              <a:rPr sz="1100" b="0">
+                <a:solidFill>
+                  <a:srgbClr val="C6CFCF"/>
+                </a:solidFill>
+                <a:latin typeface="Consolas"/>
+              </a:rPr>
+              <a:t>owner</a:t>
+            </a:r>
+          </a:p>
+        </p:txBody>
+      </p:sp>
+      <p:sp>
+        <p:nvSpPr>
+          <p:cNvPr id="21" name="TextBox 20"/>
+          <p:cNvSpPr txBox="1"/>
+          <p:nvPr/>
+        </p:nvSpPr>
+        <p:spPr>
+          <a:xfrm>
+            <a:off x="10332720" y="4014215"/>
+            <a:ext cx="1005840" cy="365760"/>
+          </a:xfrm>
+          <a:prstGeom prst="rect">
+            <a:avLst/>
+          </a:prstGeom>
+          <a:noFill/>
+        </p:spPr>
+        <p:txBody>
+          <a:bodyPr wrap="square" anchor="t">
+            <a:spAutoFit/>
+          </a:bodyPr>
+          <a:lstStyle/>
+          <a:p>
+            <a:pPr algn="l"/>
+            <a:r>
+              <a:rPr sz="1100" b="0">
+                <a:solidFill>
+                  <a:srgbClr val="C6CFCF"/>
+                </a:solidFill>
+                <a:latin typeface="Consolas"/>
+              </a:rPr>
+              <a:t>date</a:t>
+            </a:r>
+          </a:p>
+        </p:txBody>
+      </p:sp>
+      <p:sp>
+        <p:nvSpPr>
+          <p:cNvPr id="22" name="Rectangle 21"/>
+          <p:cNvSpPr/>
+          <p:nvPr/>
+        </p:nvSpPr>
+        <p:spPr>
+          <a:xfrm>
+            <a:off x="896112" y="4599432"/>
+            <a:ext cx="146304" cy="146304"/>
+          </a:xfrm>
+          <a:prstGeom prst="rect">
+            <a:avLst/>
+          </a:prstGeom>
+          <a:noFill/>
+          <a:ln w="15875">
+            <a:solidFill>
+              <a:srgbClr val="2F6F6B"/>
+            </a:solidFill>
+          </a:ln>
+          <a:effectLst/>
+        </p:spPr>
+        <p:style>
+          <a:lnRef idx="1">
+            <a:schemeClr val="accent1"/>
+          </a:lnRef>
+          <a:fillRef idx="3">
+            <a:schemeClr val="accent1"/>
+          </a:fillRef>
+          <a:effectRef idx="2">
+            <a:schemeClr val="accent1"/>
+          </a:effectRef>
+          <a:fontRef idx="minor">
+            <a:schemeClr val="lt1"/>
+          </a:fontRef>
+        </p:style>
+        <p:txBody>
+          <a:bodyPr rtlCol="0" anchor="ctr"/>
+          <a:lstStyle/>
+          <a:p>
+            <a:pPr algn="ctr"/>
+          </a:p>
+        </p:txBody>
+      </p:sp>
+      <p:sp>
+        <p:nvSpPr>
+          <p:cNvPr id="23" name="TextBox 22"/>
+          <p:cNvSpPr txBox="1"/>
+          <p:nvPr/>
+        </p:nvSpPr>
+        <p:spPr>
+          <a:xfrm>
+            <a:off x="1234440" y="4526280"/>
+            <a:ext cx="7589520" cy="365760"/>
+          </a:xfrm>
+          <a:prstGeom prst="rect">
+            <a:avLst/>
+          </a:prstGeom>
+          <a:noFill/>
+        </p:spPr>
+        <p:txBody>
+          <a:bodyPr wrap="square" anchor="t">
+            <a:spAutoFit/>
+          </a:bodyPr>
+          <a:lstStyle/>
+          <a:p>
+            <a:pPr algn="l"/>
+            <a:r>
+              <a:rPr sz="1400" b="0">
+                <a:solidFill>
+                  <a:srgbClr val="1F3243"/>
+                </a:solidFill>
+                <a:latin typeface="Segoe UI"/>
+              </a:rPr>
+              <a:t>Azure DevOps or GitHub project available to the delivery team</a:t>
+            </a:r>
+          </a:p>
+        </p:txBody>
+      </p:sp>
+      <p:sp>
+        <p:nvSpPr>
+          <p:cNvPr id="24" name="TextBox 23"/>
+          <p:cNvSpPr txBox="1"/>
+          <p:nvPr/>
+        </p:nvSpPr>
+        <p:spPr>
+          <a:xfrm>
+            <a:off x="9052560" y="4526280"/>
+            <a:ext cx="1097280" cy="365760"/>
+          </a:xfrm>
+          <a:prstGeom prst="rect">
+            <a:avLst/>
+          </a:prstGeom>
+          <a:noFill/>
+        </p:spPr>
+        <p:txBody>
+          <a:bodyPr wrap="square" anchor="t">
+            <a:spAutoFit/>
+          </a:bodyPr>
+          <a:lstStyle/>
+          <a:p>
+            <a:pPr algn="l"/>
+            <a:r>
+              <a:rPr sz="1100" b="0">
+                <a:solidFill>
+                  <a:srgbClr val="C6CFCF"/>
+                </a:solidFill>
+                <a:latin typeface="Consolas"/>
+              </a:rPr>
+              <a:t>owner</a:t>
+            </a:r>
+          </a:p>
+        </p:txBody>
+      </p:sp>
+      <p:sp>
+        <p:nvSpPr>
+          <p:cNvPr id="25" name="TextBox 24"/>
+          <p:cNvSpPr txBox="1"/>
+          <p:nvPr/>
+        </p:nvSpPr>
+        <p:spPr>
+          <a:xfrm>
+            <a:off x="10332720" y="4526280"/>
+            <a:ext cx="1005840" cy="365760"/>
+          </a:xfrm>
+          <a:prstGeom prst="rect">
+            <a:avLst/>
+          </a:prstGeom>
+          <a:noFill/>
+        </p:spPr>
+        <p:txBody>
+          <a:bodyPr wrap="square" anchor="t">
+            <a:spAutoFit/>
+          </a:bodyPr>
+          <a:lstStyle/>
+          <a:p>
+            <a:pPr algn="l"/>
+            <a:r>
+              <a:rPr sz="1100" b="0">
+                <a:solidFill>
+                  <a:srgbClr val="C6CFCF"/>
+                </a:solidFill>
+                <a:latin typeface="Consolas"/>
+              </a:rPr>
+              <a:t>date</a:t>
+            </a:r>
+          </a:p>
+        </p:txBody>
+      </p:sp>
+      <p:sp>
+        <p:nvSpPr>
+          <p:cNvPr id="26" name="Rectangle 25"/>
+          <p:cNvSpPr/>
+          <p:nvPr/>
+        </p:nvSpPr>
+        <p:spPr>
+          <a:xfrm>
+            <a:off x="896112" y="5111496"/>
+            <a:ext cx="146304" cy="146304"/>
+          </a:xfrm>
+          <a:prstGeom prst="rect">
+            <a:avLst/>
+          </a:prstGeom>
+          <a:noFill/>
+          <a:ln w="15875">
+            <a:solidFill>
+              <a:srgbClr val="2F6F6B"/>
+            </a:solidFill>
+          </a:ln>
+          <a:effectLst/>
+        </p:spPr>
+        <p:style>
+          <a:lnRef idx="1">
+            <a:schemeClr val="accent1"/>
+          </a:lnRef>
+          <a:fillRef idx="3">
+            <a:schemeClr val="accent1"/>
+          </a:fillRef>
+          <a:effectRef idx="2">
+            <a:schemeClr val="accent1"/>
+          </a:effectRef>
+          <a:fontRef idx="minor">
+            <a:schemeClr val="lt1"/>
+          </a:fontRef>
+        </p:style>
+        <p:txBody>
+          <a:bodyPr rtlCol="0" anchor="ctr"/>
+          <a:lstStyle/>
+          <a:p>
+            <a:pPr algn="ctr"/>
+          </a:p>
+        </p:txBody>
+      </p:sp>
+      <p:sp>
+        <p:nvSpPr>
+          <p:cNvPr id="27" name="TextBox 26"/>
+          <p:cNvSpPr txBox="1"/>
+          <p:nvPr/>
+        </p:nvSpPr>
+        <p:spPr>
+          <a:xfrm>
+            <a:off x="1234440" y="5038344"/>
+            <a:ext cx="7589520" cy="365760"/>
+          </a:xfrm>
+          <a:prstGeom prst="rect">
+            <a:avLst/>
+          </a:prstGeom>
+          <a:noFill/>
+        </p:spPr>
+        <p:txBody>
+          <a:bodyPr wrap="square" anchor="t">
+            <a:spAutoFit/>
+          </a:bodyPr>
+          <a:lstStyle/>
+          <a:p>
+            <a:pPr algn="l"/>
+            <a:r>
+              <a:rPr sz="1400" b="0">
+                <a:solidFill>
+                  <a:srgbClr val="1F3243"/>
+                </a:solidFill>
+                <a:latin typeface="Segoe UI"/>
+              </a:rPr>
+              <a:t>Development environment data — live, masked, or synthetic</a:t>
+            </a:r>
+          </a:p>
+        </p:txBody>
+      </p:sp>
+      <p:sp>
+        <p:nvSpPr>
+          <p:cNvPr id="28" name="TextBox 27"/>
+          <p:cNvSpPr txBox="1"/>
+          <p:nvPr/>
+        </p:nvSpPr>
+        <p:spPr>
+          <a:xfrm>
+            <a:off x="9052560" y="5038344"/>
+            <a:ext cx="1097280" cy="365760"/>
+          </a:xfrm>
+          <a:prstGeom prst="rect">
+            <a:avLst/>
+          </a:prstGeom>
+          <a:noFill/>
+        </p:spPr>
+        <p:txBody>
+          <a:bodyPr wrap="square" anchor="t">
+            <a:spAutoFit/>
+          </a:bodyPr>
+          <a:lstStyle/>
+          <a:p>
+            <a:pPr algn="l"/>
+            <a:r>
+              <a:rPr sz="1100" b="0">
+                <a:solidFill>
+                  <a:srgbClr val="C6CFCF"/>
+                </a:solidFill>
+                <a:latin typeface="Consolas"/>
+              </a:rPr>
+              <a:t>owner</a:t>
+            </a:r>
+          </a:p>
+        </p:txBody>
+      </p:sp>
+      <p:sp>
+        <p:nvSpPr>
+          <p:cNvPr id="29" name="TextBox 28"/>
+          <p:cNvSpPr txBox="1"/>
+          <p:nvPr/>
+        </p:nvSpPr>
+        <p:spPr>
+          <a:xfrm>
+            <a:off x="10332720" y="5038344"/>
+            <a:ext cx="1005840" cy="365760"/>
+          </a:xfrm>
+          <a:prstGeom prst="rect">
+            <a:avLst/>
+          </a:prstGeom>
+          <a:noFill/>
+        </p:spPr>
+        <p:txBody>
+          <a:bodyPr wrap="square" anchor="t">
+            <a:spAutoFit/>
+          </a:bodyPr>
+          <a:lstStyle/>
+          <a:p>
+            <a:pPr algn="l"/>
+            <a:r>
+              <a:rPr sz="1100" b="0">
+                <a:solidFill>
+                  <a:srgbClr val="C6CFCF"/>
+                </a:solidFill>
+                <a:latin typeface="Consolas"/>
+              </a:rPr>
+              <a:t>date</a:t>
+            </a:r>
+          </a:p>
+        </p:txBody>
+      </p:sp>
+      <p:sp>
+        <p:nvSpPr>
+          <p:cNvPr id="30" name="Rectangle 29"/>
+          <p:cNvSpPr/>
+          <p:nvPr/>
+        </p:nvSpPr>
+        <p:spPr>
+          <a:xfrm>
+            <a:off x="896112" y="5623560"/>
+            <a:ext cx="146304" cy="146304"/>
+          </a:xfrm>
+          <a:prstGeom prst="rect">
+            <a:avLst/>
+          </a:prstGeom>
+          <a:noFill/>
+          <a:ln w="15875">
+            <a:solidFill>
+              <a:srgbClr val="2F6F6B"/>
+            </a:solidFill>
+          </a:ln>
+          <a:effectLst/>
+        </p:spPr>
+        <p:style>
+          <a:lnRef idx="1">
+            <a:schemeClr val="accent1"/>
+          </a:lnRef>
+          <a:fillRef idx="3">
+            <a:schemeClr val="accent1"/>
+          </a:fillRef>
+          <a:effectRef idx="2">
+            <a:schemeClr val="accent1"/>
+          </a:effectRef>
+          <a:fontRef idx="minor">
+            <a:schemeClr val="lt1"/>
+          </a:fontRef>
+        </p:style>
+        <p:txBody>
+          <a:bodyPr rtlCol="0" anchor="ctr"/>
+          <a:lstStyle/>
+          <a:p>
+            <a:pPr algn="ctr"/>
+          </a:p>
+        </p:txBody>
+      </p:sp>
+      <p:sp>
+        <p:nvSpPr>
+          <p:cNvPr id="31" name="TextBox 30"/>
+          <p:cNvSpPr txBox="1"/>
+          <p:nvPr/>
+        </p:nvSpPr>
+        <p:spPr>
+          <a:xfrm>
+            <a:off x="1234440" y="5550408"/>
+            <a:ext cx="7589520" cy="365760"/>
+          </a:xfrm>
+          <a:prstGeom prst="rect">
+            <a:avLst/>
+          </a:prstGeom>
+          <a:noFill/>
+        </p:spPr>
+        <p:txBody>
+          <a:bodyPr wrap="square" anchor="t">
+            <a:spAutoFit/>
+          </a:bodyPr>
+          <a:lstStyle/>
+          <a:p>
+            <a:pPr algn="l"/>
+            <a:r>
+              <a:rPr sz="1400" b="0">
+                <a:solidFill>
+                  <a:srgbClr val="1F3243"/>
+                </a:solidFill>
+                <a:latin typeface="Segoe UI"/>
+              </a:rPr>
+              <a:t>Security and privacy review slot booked inside the first two weeks</a:t>
+            </a:r>
+          </a:p>
+        </p:txBody>
+      </p:sp>
+      <p:sp>
+        <p:nvSpPr>
+          <p:cNvPr id="32" name="TextBox 31"/>
+          <p:cNvSpPr txBox="1"/>
+          <p:nvPr/>
+        </p:nvSpPr>
+        <p:spPr>
+          <a:xfrm>
+            <a:off x="9052560" y="5550408"/>
+            <a:ext cx="1097280" cy="365760"/>
+          </a:xfrm>
+          <a:prstGeom prst="rect">
+            <a:avLst/>
+          </a:prstGeom>
+          <a:noFill/>
+        </p:spPr>
+        <p:txBody>
+          <a:bodyPr wrap="square" anchor="t">
+            <a:spAutoFit/>
+          </a:bodyPr>
+          <a:lstStyle/>
+          <a:p>
+            <a:pPr algn="l"/>
+            <a:r>
+              <a:rPr sz="1100" b="0">
+                <a:solidFill>
+                  <a:srgbClr val="C6CFCF"/>
+                </a:solidFill>
+                <a:latin typeface="Consolas"/>
+              </a:rPr>
+              <a:t>owner</a:t>
+            </a:r>
+          </a:p>
+        </p:txBody>
+      </p:sp>
+      <p:sp>
+        <p:nvSpPr>
+          <p:cNvPr id="33" name="TextBox 32"/>
+          <p:cNvSpPr txBox="1"/>
+          <p:nvPr/>
+        </p:nvSpPr>
+        <p:spPr>
+          <a:xfrm>
+            <a:off x="10332720" y="5550408"/>
+            <a:ext cx="1005840" cy="365760"/>
+          </a:xfrm>
+          <a:prstGeom prst="rect">
+            <a:avLst/>
+          </a:prstGeom>
+          <a:noFill/>
+        </p:spPr>
+        <p:txBody>
+          <a:bodyPr wrap="square" anchor="t">
+            <a:spAutoFit/>
+          </a:bodyPr>
+          <a:lstStyle/>
+          <a:p>
+            <a:pPr algn="l"/>
+            <a:r>
+              <a:rPr sz="1100" b="0">
+                <a:solidFill>
+                  <a:srgbClr val="C6CFCF"/>
+                </a:solidFill>
+                <a:latin typeface="Consolas"/>
+              </a:rPr>
+              <a:t>date</a:t>
+            </a:r>
+          </a:p>
+        </p:txBody>
+      </p:sp>
+      <p:sp>
+        <p:nvSpPr>
+          <p:cNvPr id="34" name="Rectangle 33"/>
+          <p:cNvSpPr/>
+          <p:nvPr/>
+        </p:nvSpPr>
+        <p:spPr>
+          <a:xfrm>
+            <a:off x="868680" y="6263640"/>
+            <a:ext cx="10424160" cy="25400"/>
+          </a:xfrm>
+          <a:prstGeom prst="rect">
+            <a:avLst/>
+          </a:prstGeom>
+          <a:solidFill>
+            <a:srgbClr val="2F6F6B"/>
+          </a:solidFill>
+          <a:ln>
+            <a:noFill/>
+          </a:ln>
+          <a:effectLst/>
+        </p:spPr>
+        <p:style>
+          <a:lnRef idx="1">
+            <a:schemeClr val="accent1"/>
+          </a:lnRef>
+          <a:fillRef idx="3">
+            <a:schemeClr val="accent1"/>
+          </a:fillRef>
+          <a:effectRef idx="2">
+            <a:schemeClr val="accent1"/>
+          </a:effectRef>
+          <a:fontRef idx="minor">
+            <a:schemeClr val="lt1"/>
+          </a:fontRef>
+        </p:style>
+        <p:txBody>
+          <a:bodyPr rtlCol="0" anchor="ctr"/>
+          <a:lstStyle/>
+          <a:p>
+            <a:pPr algn="ctr"/>
+          </a:p>
+        </p:txBody>
+      </p:sp>
+      <p:sp>
+        <p:nvSpPr>
+          <p:cNvPr id="35" name="TextBox 34"/>
+          <p:cNvSpPr txBox="1"/>
+          <p:nvPr/>
+        </p:nvSpPr>
+        <p:spPr>
+          <a:xfrm>
+            <a:off x="868680" y="6400800"/>
+            <a:ext cx="10424160" cy="365760"/>
+          </a:xfrm>
+          <a:prstGeom prst="rect">
+            <a:avLst/>
+          </a:prstGeom>
+          <a:noFill/>
+        </p:spPr>
+        <p:txBody>
+          <a:bodyPr wrap="square" anchor="t">
+            <a:spAutoFit/>
+          </a:bodyPr>
+          <a:lstStyle/>
+          <a:p>
+            <a:pPr algn="l"/>
+            <a:r>
+              <a:rPr sz="1500" b="1">
+                <a:solidFill>
+                  <a:srgbClr val="1F3243"/>
+                </a:solidFill>
+                <a:latin typeface="Georgia"/>
+              </a:rPr>
+              <a:t>Kickoff: week of 14 September 2026</a:t>
             </a:r>
           </a:p>
         </p:txBody>
@@ -7015,7 +8067,7 @@
     <p:bg>
       <p:bgPr>
         <a:solidFill>
-          <a:srgbClr val="FFFFFF"/>
+          <a:srgbClr val="1F3243"/>
         </a:solidFill>
         <a:effectLst/>
       </p:bgPr>
@@ -7035,29 +8087,29 @@
         </p:nvSpPr>
         <p:spPr>
           <a:xfrm>
-            <a:off x="822960" y="384048"/>
-            <a:ext cx="10515600" cy="320040"/>
-          </a:xfrm>
-          <a:prstGeom prst="rect">
-            <a:avLst/>
-          </a:prstGeom>
-          <a:noFill/>
-        </p:spPr>
-        <p:txBody>
-          <a:bodyPr wrap="square" anchor="t">
-            <a:spAutoFit/>
-          </a:bodyPr>
-          <a:lstStyle/>
-          <a:p>
-            <a:pPr algn="l"/>
-            <a:r>
-              <a:rPr sz="1100" b="1">
-                <a:solidFill>
-                  <a:srgbClr val="2F6F6B"/>
+            <a:off x="914400" y="2651760"/>
+            <a:ext cx="10332720" cy="365760"/>
+          </a:xfrm>
+          <a:prstGeom prst="rect">
+            <a:avLst/>
+          </a:prstGeom>
+          <a:noFill/>
+        </p:spPr>
+        <p:txBody>
+          <a:bodyPr wrap="square" anchor="t">
+            <a:spAutoFit/>
+          </a:bodyPr>
+          <a:lstStyle/>
+          <a:p>
+            <a:pPr algn="l"/>
+            <a:r>
+              <a:rPr sz="1200" b="1">
+                <a:solidFill>
+                  <a:srgbClr val="7FC4BE"/>
                 </a:solidFill>
                 <a:latin typeface="Consolas"/>
               </a:rPr>
-              <a:t>APPENDIX  ·  REPORT PAGE 2</a:t>
+              <a:t>WHAT WE ARE ASKING FOR</a:t>
             </a:r>
           </a:p>
         </p:txBody>
@@ -7070,88 +8122,84 @@
         </p:nvSpPr>
         <p:spPr>
           <a:xfrm>
-            <a:off x="822960" y="713232"/>
-            <a:ext cx="10515600" cy="365760"/>
-          </a:xfrm>
-          <a:prstGeom prst="rect">
-            <a:avLst/>
-          </a:prstGeom>
-          <a:noFill/>
-        </p:spPr>
-        <p:txBody>
-          <a:bodyPr wrap="square" anchor="t">
-            <a:spAutoFit/>
-          </a:bodyPr>
-          <a:lstStyle/>
-          <a:p>
-            <a:pPr algn="l"/>
-            <a:r>
-              <a:rPr sz="1500" b="0">
-                <a:solidFill>
-                  <a:srgbClr val="1F3243"/>
+            <a:off x="914400" y="3108960"/>
+            <a:ext cx="10058400" cy="1280160"/>
+          </a:xfrm>
+          <a:prstGeom prst="rect">
+            <a:avLst/>
+          </a:prstGeom>
+          <a:noFill/>
+        </p:spPr>
+        <p:txBody>
+          <a:bodyPr wrap="square" anchor="t">
+            <a:spAutoFit/>
+          </a:bodyPr>
+          <a:lstStyle/>
+          <a:p>
+            <a:pPr algn="l"/>
+            <a:r>
+              <a:rPr sz="3400" b="0">
+                <a:solidFill>
+                  <a:srgbClr val="FFFFFF"/>
                 </a:solidFill>
                 <a:latin typeface="Georgia"/>
               </a:rPr>
-              <a:t>Arrears deep dive — where the balance sits, and the caseload table</a:t>
-            </a:r>
-          </a:p>
-        </p:txBody>
-      </p:sp>
-      <p:pic>
-        <p:nvPicPr>
-          <p:cNvPr id="4" name="Picture 3" descr="final2.png"/>
-          <p:cNvPicPr>
-            <a:picLocks noChangeAspect="1"/>
-          </p:cNvPicPr>
-          <p:nvPr/>
-        </p:nvPicPr>
-        <p:blipFill>
-          <a:blip r:embed="rId2"/>
-          <a:stretch>
-            <a:fillRect/>
-          </a:stretch>
-        </p:blipFill>
-        <p:spPr>
-          <a:xfrm>
-            <a:off x="822960" y="1280160"/>
-            <a:ext cx="10515600" cy="3783293"/>
-          </a:xfrm>
-          <a:prstGeom prst="rect">
-            <a:avLst/>
-          </a:prstGeom>
-        </p:spPr>
-      </p:pic>
-      <p:sp>
-        <p:nvSpPr>
-          <p:cNvPr id="5" name="TextBox 4"/>
-          <p:cNvSpPr txBox="1"/>
-          <p:nvPr/>
-        </p:nvSpPr>
-        <p:spPr>
-          <a:xfrm>
-            <a:off x="822960" y="6446520"/>
-            <a:ext cx="10515600" cy="320040"/>
-          </a:xfrm>
-          <a:prstGeom prst="rect">
-            <a:avLst/>
-          </a:prstGeom>
-          <a:noFill/>
-        </p:spPr>
-        <p:txBody>
-          <a:bodyPr wrap="square" anchor="t">
-            <a:spAutoFit/>
-          </a:bodyPr>
-          <a:lstStyle/>
-          <a:p>
-            <a:pPr algn="l"/>
-            <a:r>
-              <a:rPr sz="1100" b="0">
-                <a:solidFill>
-                  <a:srgbClr val="64748B"/>
-                </a:solidFill>
-                <a:latin typeface="Consolas"/>
-              </a:rPr>
-              <a:t>Synthetic data. 120 buildings, 10,568 units, 24 months.</a:t>
+              <a:t>The two answers that shape everything else</a:t>
+            </a:r>
+          </a:p>
+        </p:txBody>
+      </p:sp>
+      <p:sp>
+        <p:nvSpPr>
+          <p:cNvPr id="4" name="TextBox 3"/>
+          <p:cNvSpPr txBox="1"/>
+          <p:nvPr/>
+        </p:nvSpPr>
+        <p:spPr>
+          <a:xfrm>
+            <a:off x="914400" y="4343400"/>
+            <a:ext cx="9692640" cy="1554480"/>
+          </a:xfrm>
+          <a:prstGeom prst="rect">
+            <a:avLst/>
+          </a:prstGeom>
+          <a:noFill/>
+        </p:spPr>
+        <p:txBody>
+          <a:bodyPr wrap="square" anchor="t">
+            <a:spAutoFit/>
+          </a:bodyPr>
+          <a:lstStyle/>
+          <a:p>
+            <a:pPr algn="l">
+              <a:spcAft>
+                <a:spcPts val="1400"/>
+              </a:spcAft>
+            </a:pPr>
+            <a:r>
+              <a:rPr sz="1700" b="0">
+                <a:solidFill>
+                  <a:srgbClr val="B4C1C2"/>
+                </a:solidFill>
+                <a:latin typeface="Georgia"/>
+              </a:rPr>
+              <a:t>Which system is the system of record for arrears balances, and which for unit vacancy — and what integration surface each one offers.</a:t>
+            </a:r>
+          </a:p>
+          <a:p>
+            <a:pPr algn="l">
+              <a:spcAft>
+                <a:spcPts val="1400"/>
+              </a:spcAft>
+            </a:pPr>
+            <a:r>
+              <a:rPr sz="1700" b="0">
+                <a:solidFill>
+                  <a:srgbClr val="B4C1C2"/>
+                </a:solidFill>
+                <a:latin typeface="Georgia"/>
+              </a:rPr>
+              <a:t>How current the data has to be for the decision the business actually makes. Daily, intraday, or near real time.</a:t>
             </a:r>
           </a:p>
         </p:txBody>
@@ -7212,7 +8260,7 @@
                 </a:solidFill>
                 <a:latin typeface="Consolas"/>
               </a:rPr>
-              <a:t>APPENDIX  ·  REPORT PAGE 3</a:t>
+              <a:t>APPENDIX  ·  REPORT PAGE 1</a:t>
             </a:r>
           </a:p>
         </p:txBody>
@@ -7247,14 +8295,169 @@
                 </a:solidFill>
                 <a:latin typeface="Georgia"/>
               </a:rPr>
-              <a:t>Vacancy and turnaround — vacancy, revenue forgone, turnaround days</a:t>
+              <a:t>Arrears overview — portfolio position, trend, aging, concentration</a:t>
             </a:r>
           </a:p>
         </p:txBody>
       </p:sp>
       <p:pic>
         <p:nvPicPr>
-          <p:cNvPr id="4" name="Picture 3" descr="final3.png"/>
+          <p:cNvPr id="4" name="Picture 3" descr="final1.png"/>
+          <p:cNvPicPr>
+            <a:picLocks noChangeAspect="1"/>
+          </p:cNvPicPr>
+          <p:nvPr/>
+        </p:nvPicPr>
+        <p:blipFill>
+          <a:blip r:embed="rId2"/>
+          <a:stretch>
+            <a:fillRect/>
+          </a:stretch>
+        </p:blipFill>
+        <p:spPr>
+          <a:xfrm>
+            <a:off x="822960" y="1280160"/>
+            <a:ext cx="10515600" cy="3783293"/>
+          </a:xfrm>
+          <a:prstGeom prst="rect">
+            <a:avLst/>
+          </a:prstGeom>
+        </p:spPr>
+      </p:pic>
+      <p:sp>
+        <p:nvSpPr>
+          <p:cNvPr id="5" name="TextBox 4"/>
+          <p:cNvSpPr txBox="1"/>
+          <p:nvPr/>
+        </p:nvSpPr>
+        <p:spPr>
+          <a:xfrm>
+            <a:off x="822960" y="6446520"/>
+            <a:ext cx="10515600" cy="320040"/>
+          </a:xfrm>
+          <a:prstGeom prst="rect">
+            <a:avLst/>
+          </a:prstGeom>
+          <a:noFill/>
+        </p:spPr>
+        <p:txBody>
+          <a:bodyPr wrap="square" anchor="t">
+            <a:spAutoFit/>
+          </a:bodyPr>
+          <a:lstStyle/>
+          <a:p>
+            <a:pPr algn="l"/>
+            <a:r>
+              <a:rPr sz="1100" b="0">
+                <a:solidFill>
+                  <a:srgbClr val="64748B"/>
+                </a:solidFill>
+                <a:latin typeface="Consolas"/>
+              </a:rPr>
+              <a:t>Synthetic data. 120 buildings, 10,568 units, 24 months.</a:t>
+            </a:r>
+          </a:p>
+        </p:txBody>
+      </p:sp>
+    </p:spTree>
+  </p:cSld>
+  <p:clrMapOvr>
+    <a:masterClrMapping/>
+  </p:clrMapOvr>
+</p:sld>
+</file>
+
+<file path=ppt/slides/slide19.xml><?xml version="1.0" encoding="utf-8"?>
+<p:sld xmlns:a="http://schemas.openxmlformats.org/drawingml/2006/main" xmlns:p="http://schemas.openxmlformats.org/presentationml/2006/main" xmlns:r="http://schemas.openxmlformats.org/officeDocument/2006/relationships">
+  <p:cSld>
+    <p:bg>
+      <p:bgPr>
+        <a:solidFill>
+          <a:srgbClr val="FFFFFF"/>
+        </a:solidFill>
+        <a:effectLst/>
+      </p:bgPr>
+    </p:bg>
+    <p:spTree>
+      <p:nvGrpSpPr>
+        <p:cNvPr id="1" name=""/>
+        <p:cNvGrpSpPr/>
+        <p:nvPr/>
+      </p:nvGrpSpPr>
+      <p:grpSpPr/>
+      <p:sp>
+        <p:nvSpPr>
+          <p:cNvPr id="2" name="TextBox 1"/>
+          <p:cNvSpPr txBox="1"/>
+          <p:nvPr/>
+        </p:nvSpPr>
+        <p:spPr>
+          <a:xfrm>
+            <a:off x="822960" y="384048"/>
+            <a:ext cx="10515600" cy="320040"/>
+          </a:xfrm>
+          <a:prstGeom prst="rect">
+            <a:avLst/>
+          </a:prstGeom>
+          <a:noFill/>
+        </p:spPr>
+        <p:txBody>
+          <a:bodyPr wrap="square" anchor="t">
+            <a:spAutoFit/>
+          </a:bodyPr>
+          <a:lstStyle/>
+          <a:p>
+            <a:pPr algn="l"/>
+            <a:r>
+              <a:rPr sz="1100" b="1">
+                <a:solidFill>
+                  <a:srgbClr val="2F6F6B"/>
+                </a:solidFill>
+                <a:latin typeface="Consolas"/>
+              </a:rPr>
+              <a:t>APPENDIX  ·  REPORT PAGE 2</a:t>
+            </a:r>
+          </a:p>
+        </p:txBody>
+      </p:sp>
+      <p:sp>
+        <p:nvSpPr>
+          <p:cNvPr id="3" name="TextBox 2"/>
+          <p:cNvSpPr txBox="1"/>
+          <p:nvPr/>
+        </p:nvSpPr>
+        <p:spPr>
+          <a:xfrm>
+            <a:off x="822960" y="713232"/>
+            <a:ext cx="10515600" cy="365760"/>
+          </a:xfrm>
+          <a:prstGeom prst="rect">
+            <a:avLst/>
+          </a:prstGeom>
+          <a:noFill/>
+        </p:spPr>
+        <p:txBody>
+          <a:bodyPr wrap="square" anchor="t">
+            <a:spAutoFit/>
+          </a:bodyPr>
+          <a:lstStyle/>
+          <a:p>
+            <a:pPr algn="l"/>
+            <a:r>
+              <a:rPr sz="1500" b="0">
+                <a:solidFill>
+                  <a:srgbClr val="1F3243"/>
+                </a:solidFill>
+                <a:latin typeface="Georgia"/>
+              </a:rPr>
+              <a:t>Arrears deep dive — where the balance sits, and the caseload table</a:t>
+            </a:r>
+          </a:p>
+        </p:txBody>
+      </p:sp>
+      <p:pic>
+        <p:nvPicPr>
+          <p:cNvPr id="4" name="Picture 3" descr="final2.png"/>
           <p:cNvPicPr>
             <a:picLocks noChangeAspect="1"/>
           </p:cNvPicPr>
@@ -7782,6 +8985,161 @@
                 <a:latin typeface="Georgia"/>
               </a:rPr>
               <a:t>The technical and security questions should surface today, not in the first sprint.</a:t>
+            </a:r>
+          </a:p>
+        </p:txBody>
+      </p:sp>
+    </p:spTree>
+  </p:cSld>
+  <p:clrMapOvr>
+    <a:masterClrMapping/>
+  </p:clrMapOvr>
+</p:sld>
+</file>
+
+<file path=ppt/slides/slide20.xml><?xml version="1.0" encoding="utf-8"?>
+<p:sld xmlns:a="http://schemas.openxmlformats.org/drawingml/2006/main" xmlns:p="http://schemas.openxmlformats.org/presentationml/2006/main" xmlns:r="http://schemas.openxmlformats.org/officeDocument/2006/relationships">
+  <p:cSld>
+    <p:bg>
+      <p:bgPr>
+        <a:solidFill>
+          <a:srgbClr val="FFFFFF"/>
+        </a:solidFill>
+        <a:effectLst/>
+      </p:bgPr>
+    </p:bg>
+    <p:spTree>
+      <p:nvGrpSpPr>
+        <p:cNvPr id="1" name=""/>
+        <p:cNvGrpSpPr/>
+        <p:nvPr/>
+      </p:nvGrpSpPr>
+      <p:grpSpPr/>
+      <p:sp>
+        <p:nvSpPr>
+          <p:cNvPr id="2" name="TextBox 1"/>
+          <p:cNvSpPr txBox="1"/>
+          <p:nvPr/>
+        </p:nvSpPr>
+        <p:spPr>
+          <a:xfrm>
+            <a:off x="822960" y="384048"/>
+            <a:ext cx="10515600" cy="320040"/>
+          </a:xfrm>
+          <a:prstGeom prst="rect">
+            <a:avLst/>
+          </a:prstGeom>
+          <a:noFill/>
+        </p:spPr>
+        <p:txBody>
+          <a:bodyPr wrap="square" anchor="t">
+            <a:spAutoFit/>
+          </a:bodyPr>
+          <a:lstStyle/>
+          <a:p>
+            <a:pPr algn="l"/>
+            <a:r>
+              <a:rPr sz="1100" b="1">
+                <a:solidFill>
+                  <a:srgbClr val="2F6F6B"/>
+                </a:solidFill>
+                <a:latin typeface="Consolas"/>
+              </a:rPr>
+              <a:t>APPENDIX  ·  REPORT PAGE 3</a:t>
+            </a:r>
+          </a:p>
+        </p:txBody>
+      </p:sp>
+      <p:sp>
+        <p:nvSpPr>
+          <p:cNvPr id="3" name="TextBox 2"/>
+          <p:cNvSpPr txBox="1"/>
+          <p:nvPr/>
+        </p:nvSpPr>
+        <p:spPr>
+          <a:xfrm>
+            <a:off x="822960" y="713232"/>
+            <a:ext cx="10515600" cy="365760"/>
+          </a:xfrm>
+          <a:prstGeom prst="rect">
+            <a:avLst/>
+          </a:prstGeom>
+          <a:noFill/>
+        </p:spPr>
+        <p:txBody>
+          <a:bodyPr wrap="square" anchor="t">
+            <a:spAutoFit/>
+          </a:bodyPr>
+          <a:lstStyle/>
+          <a:p>
+            <a:pPr algn="l"/>
+            <a:r>
+              <a:rPr sz="1500" b="0">
+                <a:solidFill>
+                  <a:srgbClr val="1F3243"/>
+                </a:solidFill>
+                <a:latin typeface="Georgia"/>
+              </a:rPr>
+              <a:t>Vacancy and turnaround — vacancy, revenue forgone, turnaround days</a:t>
+            </a:r>
+          </a:p>
+        </p:txBody>
+      </p:sp>
+      <p:pic>
+        <p:nvPicPr>
+          <p:cNvPr id="4" name="Picture 3" descr="final3.png"/>
+          <p:cNvPicPr>
+            <a:picLocks noChangeAspect="1"/>
+          </p:cNvPicPr>
+          <p:nvPr/>
+        </p:nvPicPr>
+        <p:blipFill>
+          <a:blip r:embed="rId2"/>
+          <a:stretch>
+            <a:fillRect/>
+          </a:stretch>
+        </p:blipFill>
+        <p:spPr>
+          <a:xfrm>
+            <a:off x="822960" y="1280160"/>
+            <a:ext cx="10515600" cy="3783293"/>
+          </a:xfrm>
+          <a:prstGeom prst="rect">
+            <a:avLst/>
+          </a:prstGeom>
+        </p:spPr>
+      </p:pic>
+      <p:sp>
+        <p:nvSpPr>
+          <p:cNvPr id="5" name="TextBox 4"/>
+          <p:cNvSpPr txBox="1"/>
+          <p:nvPr/>
+        </p:nvSpPr>
+        <p:spPr>
+          <a:xfrm>
+            <a:off x="822960" y="6446520"/>
+            <a:ext cx="10515600" cy="320040"/>
+          </a:xfrm>
+          <a:prstGeom prst="rect">
+            <a:avLst/>
+          </a:prstGeom>
+          <a:noFill/>
+        </p:spPr>
+        <p:txBody>
+          <a:bodyPr wrap="square" anchor="t">
+            <a:spAutoFit/>
+          </a:bodyPr>
+          <a:lstStyle/>
+          <a:p>
+            <a:pPr algn="l"/>
+            <a:r>
+              <a:rPr sz="1100" b="0">
+                <a:solidFill>
+                  <a:srgbClr val="64748B"/>
+                </a:solidFill>
+                <a:latin typeface="Consolas"/>
+              </a:rPr>
+              <a:t>Synthetic data. 120 buildings, 10,568 units, 24 months.</a:t>
             </a:r>
           </a:p>
         </p:txBody>
